--- a/docs/PROGRESS_SLIDES_2026-06-02.pptx
+++ b/docs/PROGRESS_SLIDES_2026-06-02.pptx
@@ -3626,7 +3626,7 @@
                 </a:solidFill>
                 <a:latin typeface="Calibri"/>
               </a:rPr>
-              <a:t>149</a:t>
+              <a:t>164</a:t>
             </a:r>
           </a:p>
         </p:txBody>
@@ -3661,7 +3661,7 @@
                 </a:solidFill>
                 <a:latin typeface="Calibri"/>
               </a:rPr>
-              <a:t>290 Researcher · 287 Verifier · 34 Adjudicator.</a:t>
+              <a:t>307 Researcher · 304 Verifier · 34 Adjudicator.</a:t>
             </a:r>
           </a:p>
         </p:txBody>
@@ -4012,7 +4012,7 @@
                 </a:solidFill>
                 <a:latin typeface="Calibri"/>
               </a:rPr>
-              <a:t>68%</a:t>
+              <a:t>63%</a:t>
             </a:r>
           </a:p>
         </p:txBody>
@@ -4047,7 +4047,7 @@
                 </a:solidFill>
                 <a:latin typeface="Calibri"/>
               </a:rPr>
-              <a:t>101 / 149 match against ODMI 2025.</a:t>
+              <a:t>103 / 164 match against ODMI 2025.</a:t>
             </a:r>
           </a:p>
         </p:txBody>
@@ -4205,7 +4205,7 @@
                 </a:solidFill>
                 <a:latin typeface="Calibri"/>
               </a:rPr>
-              <a:t>£31.00</a:t>
+              <a:t>£42.29</a:t>
             </a:r>
           </a:p>
         </p:txBody>
@@ -4398,7 +4398,7 @@
                 </a:solidFill>
                 <a:latin typeface="Calibri"/>
               </a:rPr>
-              <a:t>Researcher proposes, Verifier tries to disprove, Adjudicator steps in when retries are exhausted. Average runtime ~120s.</a:t>
+              <a:t>Researcher proposes, Verifier tries to disprove, Adjudicator steps in when retries are exhausted. Average runtime ~113s.</a:t>
             </a:r>
           </a:p>
         </p:txBody>
@@ -6912,7 +6912,7 @@
         </p:nvSpPr>
         <p:spPr>
           <a:xfrm>
-            <a:off x="685800" y="2958465"/>
+            <a:off x="685800" y="2959396"/>
             <a:ext cx="411480" cy="182880"/>
           </a:xfrm>
           <a:prstGeom prst="rect">
@@ -6947,7 +6947,7 @@
         </p:nvSpPr>
         <p:spPr>
           <a:xfrm>
-            <a:off x="685800" y="2945130"/>
+            <a:off x="685800" y="2946991"/>
             <a:ext cx="411480" cy="182880"/>
           </a:xfrm>
           <a:prstGeom prst="rect">
@@ -6982,7 +6982,7 @@
         </p:nvSpPr>
         <p:spPr>
           <a:xfrm>
-            <a:off x="685800" y="2931795"/>
+            <a:off x="685800" y="2934587"/>
             <a:ext cx="411480" cy="182880"/>
           </a:xfrm>
           <a:prstGeom prst="rect">
@@ -7017,7 +7017,7 @@
         </p:nvSpPr>
         <p:spPr>
           <a:xfrm>
-            <a:off x="685800" y="2918460"/>
+            <a:off x="685800" y="2922182"/>
             <a:ext cx="411480" cy="182880"/>
           </a:xfrm>
           <a:prstGeom prst="rect">
@@ -7052,7 +7052,7 @@
         </p:nvSpPr>
         <p:spPr>
           <a:xfrm>
-            <a:off x="685800" y="2905125"/>
+            <a:off x="685800" y="2909777"/>
             <a:ext cx="411480" cy="182880"/>
           </a:xfrm>
           <a:prstGeom prst="rect">
@@ -7087,7 +7087,7 @@
         </p:nvSpPr>
         <p:spPr>
           <a:xfrm>
-            <a:off x="685800" y="2891790"/>
+            <a:off x="685800" y="2897373"/>
             <a:ext cx="411480" cy="182880"/>
           </a:xfrm>
           <a:prstGeom prst="rect">
@@ -7122,7 +7122,7 @@
         </p:nvSpPr>
         <p:spPr>
           <a:xfrm>
-            <a:off x="685800" y="2878455"/>
+            <a:off x="685800" y="2884968"/>
             <a:ext cx="411480" cy="182880"/>
           </a:xfrm>
           <a:prstGeom prst="rect">
@@ -7157,7 +7157,7 @@
         </p:nvSpPr>
         <p:spPr>
           <a:xfrm>
-            <a:off x="685800" y="2865120"/>
+            <a:off x="685800" y="2872563"/>
             <a:ext cx="411480" cy="182880"/>
           </a:xfrm>
           <a:prstGeom prst="rect">
@@ -7192,7 +7192,7 @@
         </p:nvSpPr>
         <p:spPr>
           <a:xfrm>
-            <a:off x="685800" y="2851785"/>
+            <a:off x="685800" y="2860159"/>
             <a:ext cx="411480" cy="182880"/>
           </a:xfrm>
           <a:prstGeom prst="rect">
@@ -7227,7 +7227,7 @@
         </p:nvSpPr>
         <p:spPr>
           <a:xfrm>
-            <a:off x="685800" y="2838450"/>
+            <a:off x="685800" y="2847754"/>
             <a:ext cx="411480" cy="182880"/>
           </a:xfrm>
           <a:prstGeom prst="rect">
@@ -7262,7 +7262,7 @@
         </p:nvSpPr>
         <p:spPr>
           <a:xfrm>
-            <a:off x="685800" y="2825115"/>
+            <a:off x="685800" y="2835349"/>
             <a:ext cx="411480" cy="182880"/>
           </a:xfrm>
           <a:prstGeom prst="rect">
@@ -7297,7 +7297,7 @@
         </p:nvSpPr>
         <p:spPr>
           <a:xfrm>
-            <a:off x="685800" y="2811780"/>
+            <a:off x="685800" y="2822945"/>
             <a:ext cx="411480" cy="182880"/>
           </a:xfrm>
           <a:prstGeom prst="rect">
@@ -7332,7 +7332,7 @@
         </p:nvSpPr>
         <p:spPr>
           <a:xfrm>
-            <a:off x="685800" y="2798445"/>
+            <a:off x="685800" y="2810540"/>
             <a:ext cx="411480" cy="182880"/>
           </a:xfrm>
           <a:prstGeom prst="rect">
@@ -7367,7 +7367,7 @@
         </p:nvSpPr>
         <p:spPr>
           <a:xfrm>
-            <a:off x="685800" y="2785110"/>
+            <a:off x="685800" y="2798135"/>
             <a:ext cx="411480" cy="182880"/>
           </a:xfrm>
           <a:prstGeom prst="rect">
@@ -7402,7 +7402,7 @@
         </p:nvSpPr>
         <p:spPr>
           <a:xfrm>
-            <a:off x="685800" y="2771775"/>
+            <a:off x="685800" y="2785731"/>
             <a:ext cx="411480" cy="182880"/>
           </a:xfrm>
           <a:prstGeom prst="rect">
@@ -7437,7 +7437,7 @@
         </p:nvSpPr>
         <p:spPr>
           <a:xfrm>
-            <a:off x="685800" y="2758440"/>
+            <a:off x="685800" y="2773326"/>
             <a:ext cx="411480" cy="182880"/>
           </a:xfrm>
           <a:prstGeom prst="rect">
@@ -7472,7 +7472,7 @@
         </p:nvSpPr>
         <p:spPr>
           <a:xfrm>
-            <a:off x="685800" y="2745105"/>
+            <a:off x="685800" y="2760921"/>
             <a:ext cx="411480" cy="182880"/>
           </a:xfrm>
           <a:prstGeom prst="rect">
@@ -7507,7 +7507,7 @@
         </p:nvSpPr>
         <p:spPr>
           <a:xfrm>
-            <a:off x="685800" y="2731770"/>
+            <a:off x="685800" y="2748517"/>
             <a:ext cx="411480" cy="182880"/>
           </a:xfrm>
           <a:prstGeom prst="rect">
@@ -7542,7 +7542,7 @@
         </p:nvSpPr>
         <p:spPr>
           <a:xfrm>
-            <a:off x="685800" y="2718435"/>
+            <a:off x="685800" y="2736112"/>
             <a:ext cx="411480" cy="182880"/>
           </a:xfrm>
           <a:prstGeom prst="rect">
@@ -7577,7 +7577,7 @@
         </p:nvSpPr>
         <p:spPr>
           <a:xfrm>
-            <a:off x="685800" y="2705100"/>
+            <a:off x="685800" y="2723707"/>
             <a:ext cx="411480" cy="182880"/>
           </a:xfrm>
           <a:prstGeom prst="rect">
@@ -7612,7 +7612,7 @@
         </p:nvSpPr>
         <p:spPr>
           <a:xfrm>
-            <a:off x="685800" y="2691765"/>
+            <a:off x="685800" y="2711303"/>
             <a:ext cx="411480" cy="182880"/>
           </a:xfrm>
           <a:prstGeom prst="rect">
@@ -7647,7 +7647,7 @@
         </p:nvSpPr>
         <p:spPr>
           <a:xfrm>
-            <a:off x="685800" y="2678430"/>
+            <a:off x="685800" y="2698898"/>
             <a:ext cx="411480" cy="182880"/>
           </a:xfrm>
           <a:prstGeom prst="rect">
@@ -7682,7 +7682,7 @@
         </p:nvSpPr>
         <p:spPr>
           <a:xfrm>
-            <a:off x="685800" y="2665095"/>
+            <a:off x="685800" y="2686494"/>
             <a:ext cx="411480" cy="182880"/>
           </a:xfrm>
           <a:prstGeom prst="rect">
@@ -7717,7 +7717,7 @@
         </p:nvSpPr>
         <p:spPr>
           <a:xfrm>
-            <a:off x="685800" y="2651760"/>
+            <a:off x="685800" y="2674089"/>
             <a:ext cx="411480" cy="182880"/>
           </a:xfrm>
           <a:prstGeom prst="rect">
@@ -7752,7 +7752,7 @@
         </p:nvSpPr>
         <p:spPr>
           <a:xfrm>
-            <a:off x="685800" y="2638425"/>
+            <a:off x="685800" y="2661684"/>
             <a:ext cx="411480" cy="182880"/>
           </a:xfrm>
           <a:prstGeom prst="rect">
@@ -7787,7 +7787,7 @@
         </p:nvSpPr>
         <p:spPr>
           <a:xfrm>
-            <a:off x="685800" y="2625090"/>
+            <a:off x="685800" y="2649280"/>
             <a:ext cx="411480" cy="182880"/>
           </a:xfrm>
           <a:prstGeom prst="rect">
@@ -7822,7 +7822,7 @@
         </p:nvSpPr>
         <p:spPr>
           <a:xfrm>
-            <a:off x="685800" y="2611755"/>
+            <a:off x="685800" y="2636875"/>
             <a:ext cx="411480" cy="182880"/>
           </a:xfrm>
           <a:prstGeom prst="rect">
@@ -7857,7 +7857,7 @@
         </p:nvSpPr>
         <p:spPr>
           <a:xfrm>
-            <a:off x="685800" y="2598420"/>
+            <a:off x="685800" y="2624470"/>
             <a:ext cx="411480" cy="182880"/>
           </a:xfrm>
           <a:prstGeom prst="rect">
@@ -7892,7 +7892,7 @@
         </p:nvSpPr>
         <p:spPr>
           <a:xfrm>
-            <a:off x="685800" y="2585085"/>
+            <a:off x="685800" y="2612066"/>
             <a:ext cx="411480" cy="182880"/>
           </a:xfrm>
           <a:prstGeom prst="rect">
@@ -7927,7 +7927,7 @@
         </p:nvSpPr>
         <p:spPr>
           <a:xfrm>
-            <a:off x="685800" y="2571750"/>
+            <a:off x="685800" y="2599661"/>
             <a:ext cx="411480" cy="182880"/>
           </a:xfrm>
           <a:prstGeom prst="rect">
@@ -7962,7 +7962,7 @@
         </p:nvSpPr>
         <p:spPr>
           <a:xfrm>
-            <a:off x="685800" y="2558415"/>
+            <a:off x="685800" y="2587256"/>
             <a:ext cx="411480" cy="182880"/>
           </a:xfrm>
           <a:prstGeom prst="rect">
@@ -7997,7 +7997,7 @@
         </p:nvSpPr>
         <p:spPr>
           <a:xfrm>
-            <a:off x="685800" y="2545080"/>
+            <a:off x="685800" y="2574852"/>
             <a:ext cx="411480" cy="182880"/>
           </a:xfrm>
           <a:prstGeom prst="rect">
@@ -8032,7 +8032,7 @@
         </p:nvSpPr>
         <p:spPr>
           <a:xfrm>
-            <a:off x="685800" y="2531745"/>
+            <a:off x="685800" y="2562447"/>
             <a:ext cx="411480" cy="182880"/>
           </a:xfrm>
           <a:prstGeom prst="rect">
@@ -8067,7 +8067,7 @@
         </p:nvSpPr>
         <p:spPr>
           <a:xfrm>
-            <a:off x="685800" y="2518410"/>
+            <a:off x="685800" y="2550042"/>
             <a:ext cx="411480" cy="182880"/>
           </a:xfrm>
           <a:prstGeom prst="rect">
@@ -8102,7 +8102,7 @@
         </p:nvSpPr>
         <p:spPr>
           <a:xfrm>
-            <a:off x="685800" y="2505075"/>
+            <a:off x="685800" y="2537638"/>
             <a:ext cx="411480" cy="182880"/>
           </a:xfrm>
           <a:prstGeom prst="rect">
@@ -8137,7 +8137,7 @@
         </p:nvSpPr>
         <p:spPr>
           <a:xfrm>
-            <a:off x="685800" y="2491740"/>
+            <a:off x="685800" y="2525233"/>
             <a:ext cx="411480" cy="182880"/>
           </a:xfrm>
           <a:prstGeom prst="rect">
@@ -8172,7 +8172,7 @@
         </p:nvSpPr>
         <p:spPr>
           <a:xfrm>
-            <a:off x="685800" y="2478405"/>
+            <a:off x="685800" y="2512828"/>
             <a:ext cx="411480" cy="182880"/>
           </a:xfrm>
           <a:prstGeom prst="rect">
@@ -8207,7 +8207,7 @@
         </p:nvSpPr>
         <p:spPr>
           <a:xfrm>
-            <a:off x="685800" y="2465070"/>
+            <a:off x="685800" y="2500424"/>
             <a:ext cx="411480" cy="182880"/>
           </a:xfrm>
           <a:prstGeom prst="rect">
@@ -8242,7 +8242,7 @@
         </p:nvSpPr>
         <p:spPr>
           <a:xfrm>
-            <a:off x="685800" y="2451735"/>
+            <a:off x="685800" y="2488019"/>
             <a:ext cx="411480" cy="182880"/>
           </a:xfrm>
           <a:prstGeom prst="rect">
@@ -8272,6 +8272,111 @@
       <p:sp>
         <p:nvSpPr>
           <p:cNvPr id="48" name="TextBox 47"/>
+          <p:cNvSpPr txBox="1"/>
+          <p:nvPr/>
+        </p:nvSpPr>
+        <p:spPr>
+          <a:xfrm>
+            <a:off x="685800" y="2475614"/>
+            <a:ext cx="411480" cy="182880"/>
+          </a:xfrm>
+          <a:prstGeom prst="rect">
+            <a:avLst/>
+          </a:prstGeom>
+          <a:noFill/>
+        </p:spPr>
+        <p:txBody>
+          <a:bodyPr wrap="square" lIns="0" rIns="0" tIns="0" bIns="0">
+            <a:spAutoFit/>
+          </a:bodyPr>
+          <a:lstStyle/>
+          <a:p>
+            <a:pPr algn="r"/>
+            <a:r>
+              <a:rPr sz="900" b="0">
+                <a:solidFill>
+                  <a:srgbClr val="718096"/>
+                </a:solidFill>
+                <a:latin typeface="Calibri"/>
+              </a:rPr>
+              <a:t>40</a:t>
+            </a:r>
+          </a:p>
+        </p:txBody>
+      </p:sp>
+      <p:sp>
+        <p:nvSpPr>
+          <p:cNvPr id="49" name="TextBox 48"/>
+          <p:cNvSpPr txBox="1"/>
+          <p:nvPr/>
+        </p:nvSpPr>
+        <p:spPr>
+          <a:xfrm>
+            <a:off x="685800" y="2463210"/>
+            <a:ext cx="411480" cy="182880"/>
+          </a:xfrm>
+          <a:prstGeom prst="rect">
+            <a:avLst/>
+          </a:prstGeom>
+          <a:noFill/>
+        </p:spPr>
+        <p:txBody>
+          <a:bodyPr wrap="square" lIns="0" rIns="0" tIns="0" bIns="0">
+            <a:spAutoFit/>
+          </a:bodyPr>
+          <a:lstStyle/>
+          <a:p>
+            <a:pPr algn="r"/>
+            <a:r>
+              <a:rPr sz="900" b="0">
+                <a:solidFill>
+                  <a:srgbClr val="718096"/>
+                </a:solidFill>
+                <a:latin typeface="Calibri"/>
+              </a:rPr>
+              <a:t>41</a:t>
+            </a:r>
+          </a:p>
+        </p:txBody>
+      </p:sp>
+      <p:sp>
+        <p:nvSpPr>
+          <p:cNvPr id="50" name="TextBox 49"/>
+          <p:cNvSpPr txBox="1"/>
+          <p:nvPr/>
+        </p:nvSpPr>
+        <p:spPr>
+          <a:xfrm>
+            <a:off x="685800" y="2450805"/>
+            <a:ext cx="411480" cy="182880"/>
+          </a:xfrm>
+          <a:prstGeom prst="rect">
+            <a:avLst/>
+          </a:prstGeom>
+          <a:noFill/>
+        </p:spPr>
+        <p:txBody>
+          <a:bodyPr wrap="square" lIns="0" rIns="0" tIns="0" bIns="0">
+            <a:spAutoFit/>
+          </a:bodyPr>
+          <a:lstStyle/>
+          <a:p>
+            <a:pPr algn="r"/>
+            <a:r>
+              <a:rPr sz="900" b="0">
+                <a:solidFill>
+                  <a:srgbClr val="718096"/>
+                </a:solidFill>
+                <a:latin typeface="Calibri"/>
+              </a:rPr>
+              <a:t>42</a:t>
+            </a:r>
+          </a:p>
+        </p:txBody>
+      </p:sp>
+      <p:sp>
+        <p:nvSpPr>
+          <p:cNvPr id="51" name="TextBox 50"/>
           <p:cNvSpPr txBox="1"/>
           <p:nvPr/>
         </p:nvSpPr>
@@ -8299,20 +8404,20 @@
                 </a:solidFill>
                 <a:latin typeface="Calibri"/>
               </a:rPr>
-              <a:t>40</a:t>
-            </a:r>
-          </a:p>
-        </p:txBody>
-      </p:sp>
-      <p:sp>
-        <p:nvSpPr>
-          <p:cNvPr id="49" name="TextBox 48"/>
-          <p:cNvSpPr txBox="1"/>
-          <p:nvPr/>
-        </p:nvSpPr>
-        <p:spPr>
-          <a:xfrm>
-            <a:off x="685800" y="2425065"/>
+              <a:t>43</a:t>
+            </a:r>
+          </a:p>
+        </p:txBody>
+      </p:sp>
+      <p:sp>
+        <p:nvSpPr>
+          <p:cNvPr id="52" name="TextBox 51"/>
+          <p:cNvSpPr txBox="1"/>
+          <p:nvPr/>
+        </p:nvSpPr>
+        <p:spPr>
+          <a:xfrm>
+            <a:off x="685800" y="2425996"/>
             <a:ext cx="411480" cy="182880"/>
           </a:xfrm>
           <a:prstGeom prst="rect">
@@ -8334,20 +8439,20 @@
                 </a:solidFill>
                 <a:latin typeface="Calibri"/>
               </a:rPr>
-              <a:t>41</a:t>
-            </a:r>
-          </a:p>
-        </p:txBody>
-      </p:sp>
-      <p:sp>
-        <p:nvSpPr>
-          <p:cNvPr id="50" name="TextBox 49"/>
-          <p:cNvSpPr txBox="1"/>
-          <p:nvPr/>
-        </p:nvSpPr>
-        <p:spPr>
-          <a:xfrm>
-            <a:off x="685800" y="2411730"/>
+              <a:t>44</a:t>
+            </a:r>
+          </a:p>
+        </p:txBody>
+      </p:sp>
+      <p:sp>
+        <p:nvSpPr>
+          <p:cNvPr id="53" name="TextBox 52"/>
+          <p:cNvSpPr txBox="1"/>
+          <p:nvPr/>
+        </p:nvSpPr>
+        <p:spPr>
+          <a:xfrm>
+            <a:off x="685800" y="2413591"/>
             <a:ext cx="411480" cy="182880"/>
           </a:xfrm>
           <a:prstGeom prst="rect">
@@ -8369,20 +8474,20 @@
                 </a:solidFill>
                 <a:latin typeface="Calibri"/>
               </a:rPr>
-              <a:t>42</a:t>
-            </a:r>
-          </a:p>
-        </p:txBody>
-      </p:sp>
-      <p:sp>
-        <p:nvSpPr>
-          <p:cNvPr id="51" name="TextBox 50"/>
-          <p:cNvSpPr txBox="1"/>
-          <p:nvPr/>
-        </p:nvSpPr>
-        <p:spPr>
-          <a:xfrm>
-            <a:off x="685800" y="2398395"/>
+              <a:t>45</a:t>
+            </a:r>
+          </a:p>
+        </p:txBody>
+      </p:sp>
+      <p:sp>
+        <p:nvSpPr>
+          <p:cNvPr id="54" name="TextBox 53"/>
+          <p:cNvSpPr txBox="1"/>
+          <p:nvPr/>
+        </p:nvSpPr>
+        <p:spPr>
+          <a:xfrm>
+            <a:off x="685800" y="2401187"/>
             <a:ext cx="411480" cy="182880"/>
           </a:xfrm>
           <a:prstGeom prst="rect">
@@ -8404,20 +8509,20 @@
                 </a:solidFill>
                 <a:latin typeface="Calibri"/>
               </a:rPr>
-              <a:t>43</a:t>
-            </a:r>
-          </a:p>
-        </p:txBody>
-      </p:sp>
-      <p:sp>
-        <p:nvSpPr>
-          <p:cNvPr id="52" name="TextBox 51"/>
-          <p:cNvSpPr txBox="1"/>
-          <p:nvPr/>
-        </p:nvSpPr>
-        <p:spPr>
-          <a:xfrm>
-            <a:off x="685800" y="2385060"/>
+              <a:t>46</a:t>
+            </a:r>
+          </a:p>
+        </p:txBody>
+      </p:sp>
+      <p:sp>
+        <p:nvSpPr>
+          <p:cNvPr id="55" name="TextBox 54"/>
+          <p:cNvSpPr txBox="1"/>
+          <p:nvPr/>
+        </p:nvSpPr>
+        <p:spPr>
+          <a:xfrm>
+            <a:off x="685800" y="2388782"/>
             <a:ext cx="411480" cy="182880"/>
           </a:xfrm>
           <a:prstGeom prst="rect">
@@ -8439,20 +8544,20 @@
                 </a:solidFill>
                 <a:latin typeface="Calibri"/>
               </a:rPr>
-              <a:t>44</a:t>
-            </a:r>
-          </a:p>
-        </p:txBody>
-      </p:sp>
-      <p:sp>
-        <p:nvSpPr>
-          <p:cNvPr id="53" name="TextBox 52"/>
-          <p:cNvSpPr txBox="1"/>
-          <p:nvPr/>
-        </p:nvSpPr>
-        <p:spPr>
-          <a:xfrm>
-            <a:off x="685800" y="2371725"/>
+              <a:t>47</a:t>
+            </a:r>
+          </a:p>
+        </p:txBody>
+      </p:sp>
+      <p:sp>
+        <p:nvSpPr>
+          <p:cNvPr id="56" name="TextBox 55"/>
+          <p:cNvSpPr txBox="1"/>
+          <p:nvPr/>
+        </p:nvSpPr>
+        <p:spPr>
+          <a:xfrm>
+            <a:off x="685800" y="2376377"/>
             <a:ext cx="411480" cy="182880"/>
           </a:xfrm>
           <a:prstGeom prst="rect">
@@ -8474,20 +8579,20 @@
                 </a:solidFill>
                 <a:latin typeface="Calibri"/>
               </a:rPr>
-              <a:t>45</a:t>
-            </a:r>
-          </a:p>
-        </p:txBody>
-      </p:sp>
-      <p:sp>
-        <p:nvSpPr>
-          <p:cNvPr id="54" name="TextBox 53"/>
-          <p:cNvSpPr txBox="1"/>
-          <p:nvPr/>
-        </p:nvSpPr>
-        <p:spPr>
-          <a:xfrm>
-            <a:off x="685800" y="2358390"/>
+              <a:t>48</a:t>
+            </a:r>
+          </a:p>
+        </p:txBody>
+      </p:sp>
+      <p:sp>
+        <p:nvSpPr>
+          <p:cNvPr id="57" name="TextBox 56"/>
+          <p:cNvSpPr txBox="1"/>
+          <p:nvPr/>
+        </p:nvSpPr>
+        <p:spPr>
+          <a:xfrm>
+            <a:off x="685800" y="2363973"/>
             <a:ext cx="411480" cy="182880"/>
           </a:xfrm>
           <a:prstGeom prst="rect">
@@ -8509,20 +8614,20 @@
                 </a:solidFill>
                 <a:latin typeface="Calibri"/>
               </a:rPr>
-              <a:t>46</a:t>
-            </a:r>
-          </a:p>
-        </p:txBody>
-      </p:sp>
-      <p:sp>
-        <p:nvSpPr>
-          <p:cNvPr id="55" name="TextBox 54"/>
-          <p:cNvSpPr txBox="1"/>
-          <p:nvPr/>
-        </p:nvSpPr>
-        <p:spPr>
-          <a:xfrm>
-            <a:off x="685800" y="2345055"/>
+              <a:t>49</a:t>
+            </a:r>
+          </a:p>
+        </p:txBody>
+      </p:sp>
+      <p:sp>
+        <p:nvSpPr>
+          <p:cNvPr id="58" name="TextBox 57"/>
+          <p:cNvSpPr txBox="1"/>
+          <p:nvPr/>
+        </p:nvSpPr>
+        <p:spPr>
+          <a:xfrm>
+            <a:off x="685800" y="2351568"/>
             <a:ext cx="411480" cy="182880"/>
           </a:xfrm>
           <a:prstGeom prst="rect">
@@ -8544,20 +8649,20 @@
                 </a:solidFill>
                 <a:latin typeface="Calibri"/>
               </a:rPr>
-              <a:t>47</a:t>
-            </a:r>
-          </a:p>
-        </p:txBody>
-      </p:sp>
-      <p:sp>
-        <p:nvSpPr>
-          <p:cNvPr id="56" name="TextBox 55"/>
-          <p:cNvSpPr txBox="1"/>
-          <p:nvPr/>
-        </p:nvSpPr>
-        <p:spPr>
-          <a:xfrm>
-            <a:off x="685800" y="2331720"/>
+              <a:t>50</a:t>
+            </a:r>
+          </a:p>
+        </p:txBody>
+      </p:sp>
+      <p:sp>
+        <p:nvSpPr>
+          <p:cNvPr id="59" name="TextBox 58"/>
+          <p:cNvSpPr txBox="1"/>
+          <p:nvPr/>
+        </p:nvSpPr>
+        <p:spPr>
+          <a:xfrm>
+            <a:off x="685800" y="2339163"/>
             <a:ext cx="411480" cy="182880"/>
           </a:xfrm>
           <a:prstGeom prst="rect">
@@ -8579,20 +8684,20 @@
                 </a:solidFill>
                 <a:latin typeface="Calibri"/>
               </a:rPr>
-              <a:t>48</a:t>
-            </a:r>
-          </a:p>
-        </p:txBody>
-      </p:sp>
-      <p:sp>
-        <p:nvSpPr>
-          <p:cNvPr id="57" name="TextBox 56"/>
-          <p:cNvSpPr txBox="1"/>
-          <p:nvPr/>
-        </p:nvSpPr>
-        <p:spPr>
-          <a:xfrm>
-            <a:off x="685800" y="2318385"/>
+              <a:t>51</a:t>
+            </a:r>
+          </a:p>
+        </p:txBody>
+      </p:sp>
+      <p:sp>
+        <p:nvSpPr>
+          <p:cNvPr id="60" name="TextBox 59"/>
+          <p:cNvSpPr txBox="1"/>
+          <p:nvPr/>
+        </p:nvSpPr>
+        <p:spPr>
+          <a:xfrm>
+            <a:off x="685800" y="2326759"/>
             <a:ext cx="411480" cy="182880"/>
           </a:xfrm>
           <a:prstGeom prst="rect">
@@ -8614,20 +8719,20 @@
                 </a:solidFill>
                 <a:latin typeface="Calibri"/>
               </a:rPr>
-              <a:t>49</a:t>
-            </a:r>
-          </a:p>
-        </p:txBody>
-      </p:sp>
-      <p:sp>
-        <p:nvSpPr>
-          <p:cNvPr id="58" name="TextBox 57"/>
-          <p:cNvSpPr txBox="1"/>
-          <p:nvPr/>
-        </p:nvSpPr>
-        <p:spPr>
-          <a:xfrm>
-            <a:off x="685800" y="2305050"/>
+              <a:t>52</a:t>
+            </a:r>
+          </a:p>
+        </p:txBody>
+      </p:sp>
+      <p:sp>
+        <p:nvSpPr>
+          <p:cNvPr id="61" name="TextBox 60"/>
+          <p:cNvSpPr txBox="1"/>
+          <p:nvPr/>
+        </p:nvSpPr>
+        <p:spPr>
+          <a:xfrm>
+            <a:off x="685800" y="2314354"/>
             <a:ext cx="411480" cy="182880"/>
           </a:xfrm>
           <a:prstGeom prst="rect">
@@ -8649,20 +8754,20 @@
                 </a:solidFill>
                 <a:latin typeface="Calibri"/>
               </a:rPr>
-              <a:t>50</a:t>
-            </a:r>
-          </a:p>
-        </p:txBody>
-      </p:sp>
-      <p:sp>
-        <p:nvSpPr>
-          <p:cNvPr id="59" name="TextBox 58"/>
-          <p:cNvSpPr txBox="1"/>
-          <p:nvPr/>
-        </p:nvSpPr>
-        <p:spPr>
-          <a:xfrm>
-            <a:off x="685800" y="2291715"/>
+              <a:t>53</a:t>
+            </a:r>
+          </a:p>
+        </p:txBody>
+      </p:sp>
+      <p:sp>
+        <p:nvSpPr>
+          <p:cNvPr id="62" name="TextBox 61"/>
+          <p:cNvSpPr txBox="1"/>
+          <p:nvPr/>
+        </p:nvSpPr>
+        <p:spPr>
+          <a:xfrm>
+            <a:off x="685800" y="2301949"/>
             <a:ext cx="411480" cy="182880"/>
           </a:xfrm>
           <a:prstGeom prst="rect">
@@ -8684,20 +8789,20 @@
                 </a:solidFill>
                 <a:latin typeface="Calibri"/>
               </a:rPr>
-              <a:t>51</a:t>
-            </a:r>
-          </a:p>
-        </p:txBody>
-      </p:sp>
-      <p:sp>
-        <p:nvSpPr>
-          <p:cNvPr id="60" name="TextBox 59"/>
-          <p:cNvSpPr txBox="1"/>
-          <p:nvPr/>
-        </p:nvSpPr>
-        <p:spPr>
-          <a:xfrm>
-            <a:off x="685800" y="2278380"/>
+              <a:t>54</a:t>
+            </a:r>
+          </a:p>
+        </p:txBody>
+      </p:sp>
+      <p:sp>
+        <p:nvSpPr>
+          <p:cNvPr id="63" name="TextBox 62"/>
+          <p:cNvSpPr txBox="1"/>
+          <p:nvPr/>
+        </p:nvSpPr>
+        <p:spPr>
+          <a:xfrm>
+            <a:off x="685800" y="2289545"/>
             <a:ext cx="411480" cy="182880"/>
           </a:xfrm>
           <a:prstGeom prst="rect">
@@ -8719,20 +8824,20 @@
                 </a:solidFill>
                 <a:latin typeface="Calibri"/>
               </a:rPr>
-              <a:t>52</a:t>
-            </a:r>
-          </a:p>
-        </p:txBody>
-      </p:sp>
-      <p:sp>
-        <p:nvSpPr>
-          <p:cNvPr id="61" name="TextBox 60"/>
-          <p:cNvSpPr txBox="1"/>
-          <p:nvPr/>
-        </p:nvSpPr>
-        <p:spPr>
-          <a:xfrm>
-            <a:off x="685800" y="2265045"/>
+              <a:t>55</a:t>
+            </a:r>
+          </a:p>
+        </p:txBody>
+      </p:sp>
+      <p:sp>
+        <p:nvSpPr>
+          <p:cNvPr id="64" name="TextBox 63"/>
+          <p:cNvSpPr txBox="1"/>
+          <p:nvPr/>
+        </p:nvSpPr>
+        <p:spPr>
+          <a:xfrm>
+            <a:off x="685800" y="2277140"/>
             <a:ext cx="411480" cy="182880"/>
           </a:xfrm>
           <a:prstGeom prst="rect">
@@ -8754,20 +8859,20 @@
                 </a:solidFill>
                 <a:latin typeface="Calibri"/>
               </a:rPr>
-              <a:t>53</a:t>
-            </a:r>
-          </a:p>
-        </p:txBody>
-      </p:sp>
-      <p:sp>
-        <p:nvSpPr>
-          <p:cNvPr id="62" name="TextBox 61"/>
-          <p:cNvSpPr txBox="1"/>
-          <p:nvPr/>
-        </p:nvSpPr>
-        <p:spPr>
-          <a:xfrm>
-            <a:off x="685800" y="2251710"/>
+              <a:t>56</a:t>
+            </a:r>
+          </a:p>
+        </p:txBody>
+      </p:sp>
+      <p:sp>
+        <p:nvSpPr>
+          <p:cNvPr id="65" name="TextBox 64"/>
+          <p:cNvSpPr txBox="1"/>
+          <p:nvPr/>
+        </p:nvSpPr>
+        <p:spPr>
+          <a:xfrm>
+            <a:off x="685800" y="2264735"/>
             <a:ext cx="411480" cy="182880"/>
           </a:xfrm>
           <a:prstGeom prst="rect">
@@ -8789,20 +8894,20 @@
                 </a:solidFill>
                 <a:latin typeface="Calibri"/>
               </a:rPr>
-              <a:t>54</a:t>
-            </a:r>
-          </a:p>
-        </p:txBody>
-      </p:sp>
-      <p:sp>
-        <p:nvSpPr>
-          <p:cNvPr id="63" name="TextBox 62"/>
-          <p:cNvSpPr txBox="1"/>
-          <p:nvPr/>
-        </p:nvSpPr>
-        <p:spPr>
-          <a:xfrm>
-            <a:off x="685800" y="2238375"/>
+              <a:t>57</a:t>
+            </a:r>
+          </a:p>
+        </p:txBody>
+      </p:sp>
+      <p:sp>
+        <p:nvSpPr>
+          <p:cNvPr id="66" name="TextBox 65"/>
+          <p:cNvSpPr txBox="1"/>
+          <p:nvPr/>
+        </p:nvSpPr>
+        <p:spPr>
+          <a:xfrm>
+            <a:off x="685800" y="2252331"/>
             <a:ext cx="411480" cy="182880"/>
           </a:xfrm>
           <a:prstGeom prst="rect">
@@ -8824,20 +8929,20 @@
                 </a:solidFill>
                 <a:latin typeface="Calibri"/>
               </a:rPr>
-              <a:t>55</a:t>
-            </a:r>
-          </a:p>
-        </p:txBody>
-      </p:sp>
-      <p:sp>
-        <p:nvSpPr>
-          <p:cNvPr id="64" name="TextBox 63"/>
-          <p:cNvSpPr txBox="1"/>
-          <p:nvPr/>
-        </p:nvSpPr>
-        <p:spPr>
-          <a:xfrm>
-            <a:off x="685800" y="2225040"/>
+              <a:t>58</a:t>
+            </a:r>
+          </a:p>
+        </p:txBody>
+      </p:sp>
+      <p:sp>
+        <p:nvSpPr>
+          <p:cNvPr id="67" name="TextBox 66"/>
+          <p:cNvSpPr txBox="1"/>
+          <p:nvPr/>
+        </p:nvSpPr>
+        <p:spPr>
+          <a:xfrm>
+            <a:off x="685800" y="2239926"/>
             <a:ext cx="411480" cy="182880"/>
           </a:xfrm>
           <a:prstGeom prst="rect">
@@ -8859,20 +8964,20 @@
                 </a:solidFill>
                 <a:latin typeface="Calibri"/>
               </a:rPr>
-              <a:t>56</a:t>
-            </a:r>
-          </a:p>
-        </p:txBody>
-      </p:sp>
-      <p:sp>
-        <p:nvSpPr>
-          <p:cNvPr id="65" name="TextBox 64"/>
-          <p:cNvSpPr txBox="1"/>
-          <p:nvPr/>
-        </p:nvSpPr>
-        <p:spPr>
-          <a:xfrm>
-            <a:off x="685800" y="2211705"/>
+              <a:t>59</a:t>
+            </a:r>
+          </a:p>
+        </p:txBody>
+      </p:sp>
+      <p:sp>
+        <p:nvSpPr>
+          <p:cNvPr id="68" name="TextBox 67"/>
+          <p:cNvSpPr txBox="1"/>
+          <p:nvPr/>
+        </p:nvSpPr>
+        <p:spPr>
+          <a:xfrm>
+            <a:off x="685800" y="2227521"/>
             <a:ext cx="411480" cy="182880"/>
           </a:xfrm>
           <a:prstGeom prst="rect">
@@ -8894,20 +8999,20 @@
                 </a:solidFill>
                 <a:latin typeface="Calibri"/>
               </a:rPr>
-              <a:t>57</a:t>
-            </a:r>
-          </a:p>
-        </p:txBody>
-      </p:sp>
-      <p:sp>
-        <p:nvSpPr>
-          <p:cNvPr id="66" name="TextBox 65"/>
-          <p:cNvSpPr txBox="1"/>
-          <p:nvPr/>
-        </p:nvSpPr>
-        <p:spPr>
-          <a:xfrm>
-            <a:off x="685800" y="2198370"/>
+              <a:t>60</a:t>
+            </a:r>
+          </a:p>
+        </p:txBody>
+      </p:sp>
+      <p:sp>
+        <p:nvSpPr>
+          <p:cNvPr id="69" name="TextBox 68"/>
+          <p:cNvSpPr txBox="1"/>
+          <p:nvPr/>
+        </p:nvSpPr>
+        <p:spPr>
+          <a:xfrm>
+            <a:off x="685800" y="2215117"/>
             <a:ext cx="411480" cy="182880"/>
           </a:xfrm>
           <a:prstGeom prst="rect">
@@ -8929,20 +9034,20 @@
                 </a:solidFill>
                 <a:latin typeface="Calibri"/>
               </a:rPr>
-              <a:t>58</a:t>
-            </a:r>
-          </a:p>
-        </p:txBody>
-      </p:sp>
-      <p:sp>
-        <p:nvSpPr>
-          <p:cNvPr id="67" name="TextBox 66"/>
-          <p:cNvSpPr txBox="1"/>
-          <p:nvPr/>
-        </p:nvSpPr>
-        <p:spPr>
-          <a:xfrm>
-            <a:off x="685800" y="2185035"/>
+              <a:t>61</a:t>
+            </a:r>
+          </a:p>
+        </p:txBody>
+      </p:sp>
+      <p:sp>
+        <p:nvSpPr>
+          <p:cNvPr id="70" name="TextBox 69"/>
+          <p:cNvSpPr txBox="1"/>
+          <p:nvPr/>
+        </p:nvSpPr>
+        <p:spPr>
+          <a:xfrm>
+            <a:off x="685800" y="2202712"/>
             <a:ext cx="411480" cy="182880"/>
           </a:xfrm>
           <a:prstGeom prst="rect">
@@ -8964,20 +9069,20 @@
                 </a:solidFill>
                 <a:latin typeface="Calibri"/>
               </a:rPr>
-              <a:t>59</a:t>
-            </a:r>
-          </a:p>
-        </p:txBody>
-      </p:sp>
-      <p:sp>
-        <p:nvSpPr>
-          <p:cNvPr id="68" name="TextBox 67"/>
-          <p:cNvSpPr txBox="1"/>
-          <p:nvPr/>
-        </p:nvSpPr>
-        <p:spPr>
-          <a:xfrm>
-            <a:off x="685800" y="2171700"/>
+              <a:t>62</a:t>
+            </a:r>
+          </a:p>
+        </p:txBody>
+      </p:sp>
+      <p:sp>
+        <p:nvSpPr>
+          <p:cNvPr id="71" name="TextBox 70"/>
+          <p:cNvSpPr txBox="1"/>
+          <p:nvPr/>
+        </p:nvSpPr>
+        <p:spPr>
+          <a:xfrm>
+            <a:off x="685800" y="2190307"/>
             <a:ext cx="411480" cy="182880"/>
           </a:xfrm>
           <a:prstGeom prst="rect">
@@ -8999,20 +9104,20 @@
                 </a:solidFill>
                 <a:latin typeface="Calibri"/>
               </a:rPr>
-              <a:t>60</a:t>
-            </a:r>
-          </a:p>
-        </p:txBody>
-      </p:sp>
-      <p:sp>
-        <p:nvSpPr>
-          <p:cNvPr id="69" name="TextBox 68"/>
-          <p:cNvSpPr txBox="1"/>
-          <p:nvPr/>
-        </p:nvSpPr>
-        <p:spPr>
-          <a:xfrm>
-            <a:off x="685800" y="2158365"/>
+              <a:t>63</a:t>
+            </a:r>
+          </a:p>
+        </p:txBody>
+      </p:sp>
+      <p:sp>
+        <p:nvSpPr>
+          <p:cNvPr id="72" name="TextBox 71"/>
+          <p:cNvSpPr txBox="1"/>
+          <p:nvPr/>
+        </p:nvSpPr>
+        <p:spPr>
+          <a:xfrm>
+            <a:off x="685800" y="2177903"/>
             <a:ext cx="411480" cy="182880"/>
           </a:xfrm>
           <a:prstGeom prst="rect">
@@ -9034,20 +9139,20 @@
                 </a:solidFill>
                 <a:latin typeface="Calibri"/>
               </a:rPr>
-              <a:t>61</a:t>
-            </a:r>
-          </a:p>
-        </p:txBody>
-      </p:sp>
-      <p:sp>
-        <p:nvSpPr>
-          <p:cNvPr id="70" name="TextBox 69"/>
-          <p:cNvSpPr txBox="1"/>
-          <p:nvPr/>
-        </p:nvSpPr>
-        <p:spPr>
-          <a:xfrm>
-            <a:off x="685800" y="2145030"/>
+              <a:t>64</a:t>
+            </a:r>
+          </a:p>
+        </p:txBody>
+      </p:sp>
+      <p:sp>
+        <p:nvSpPr>
+          <p:cNvPr id="73" name="TextBox 72"/>
+          <p:cNvSpPr txBox="1"/>
+          <p:nvPr/>
+        </p:nvSpPr>
+        <p:spPr>
+          <a:xfrm>
+            <a:off x="685800" y="2165498"/>
             <a:ext cx="411480" cy="182880"/>
           </a:xfrm>
           <a:prstGeom prst="rect">
@@ -9069,20 +9174,20 @@
                 </a:solidFill>
                 <a:latin typeface="Calibri"/>
               </a:rPr>
-              <a:t>62</a:t>
-            </a:r>
-          </a:p>
-        </p:txBody>
-      </p:sp>
-      <p:sp>
-        <p:nvSpPr>
-          <p:cNvPr id="71" name="TextBox 70"/>
-          <p:cNvSpPr txBox="1"/>
-          <p:nvPr/>
-        </p:nvSpPr>
-        <p:spPr>
-          <a:xfrm>
-            <a:off x="685800" y="2131695"/>
+              <a:t>65</a:t>
+            </a:r>
+          </a:p>
+        </p:txBody>
+      </p:sp>
+      <p:sp>
+        <p:nvSpPr>
+          <p:cNvPr id="74" name="TextBox 73"/>
+          <p:cNvSpPr txBox="1"/>
+          <p:nvPr/>
+        </p:nvSpPr>
+        <p:spPr>
+          <a:xfrm>
+            <a:off x="685800" y="2153094"/>
             <a:ext cx="411480" cy="182880"/>
           </a:xfrm>
           <a:prstGeom prst="rect">
@@ -9104,20 +9209,20 @@
                 </a:solidFill>
                 <a:latin typeface="Calibri"/>
               </a:rPr>
-              <a:t>63</a:t>
-            </a:r>
-          </a:p>
-        </p:txBody>
-      </p:sp>
-      <p:sp>
-        <p:nvSpPr>
-          <p:cNvPr id="72" name="TextBox 71"/>
-          <p:cNvSpPr txBox="1"/>
-          <p:nvPr/>
-        </p:nvSpPr>
-        <p:spPr>
-          <a:xfrm>
-            <a:off x="685800" y="2118360"/>
+              <a:t>66</a:t>
+            </a:r>
+          </a:p>
+        </p:txBody>
+      </p:sp>
+      <p:sp>
+        <p:nvSpPr>
+          <p:cNvPr id="75" name="TextBox 74"/>
+          <p:cNvSpPr txBox="1"/>
+          <p:nvPr/>
+        </p:nvSpPr>
+        <p:spPr>
+          <a:xfrm>
+            <a:off x="685800" y="2140689"/>
             <a:ext cx="411480" cy="182880"/>
           </a:xfrm>
           <a:prstGeom prst="rect">
@@ -9139,20 +9244,20 @@
                 </a:solidFill>
                 <a:latin typeface="Calibri"/>
               </a:rPr>
-              <a:t>64</a:t>
-            </a:r>
-          </a:p>
-        </p:txBody>
-      </p:sp>
-      <p:sp>
-        <p:nvSpPr>
-          <p:cNvPr id="73" name="TextBox 72"/>
-          <p:cNvSpPr txBox="1"/>
-          <p:nvPr/>
-        </p:nvSpPr>
-        <p:spPr>
-          <a:xfrm>
-            <a:off x="685800" y="2105026"/>
+              <a:t>67</a:t>
+            </a:r>
+          </a:p>
+        </p:txBody>
+      </p:sp>
+      <p:sp>
+        <p:nvSpPr>
+          <p:cNvPr id="76" name="TextBox 75"/>
+          <p:cNvSpPr txBox="1"/>
+          <p:nvPr/>
+        </p:nvSpPr>
+        <p:spPr>
+          <a:xfrm>
+            <a:off x="685800" y="2128284"/>
             <a:ext cx="411480" cy="182880"/>
           </a:xfrm>
           <a:prstGeom prst="rect">
@@ -9174,20 +9279,20 @@
                 </a:solidFill>
                 <a:latin typeface="Calibri"/>
               </a:rPr>
-              <a:t>65</a:t>
-            </a:r>
-          </a:p>
-        </p:txBody>
-      </p:sp>
-      <p:sp>
-        <p:nvSpPr>
-          <p:cNvPr id="74" name="TextBox 73"/>
-          <p:cNvSpPr txBox="1"/>
-          <p:nvPr/>
-        </p:nvSpPr>
-        <p:spPr>
-          <a:xfrm>
-            <a:off x="685800" y="2091690"/>
+              <a:t>68</a:t>
+            </a:r>
+          </a:p>
+        </p:txBody>
+      </p:sp>
+      <p:sp>
+        <p:nvSpPr>
+          <p:cNvPr id="77" name="TextBox 76"/>
+          <p:cNvSpPr txBox="1"/>
+          <p:nvPr/>
+        </p:nvSpPr>
+        <p:spPr>
+          <a:xfrm>
+            <a:off x="685800" y="2115880"/>
             <a:ext cx="411480" cy="182880"/>
           </a:xfrm>
           <a:prstGeom prst="rect">
@@ -9209,20 +9314,20 @@
                 </a:solidFill>
                 <a:latin typeface="Calibri"/>
               </a:rPr>
-              <a:t>66</a:t>
-            </a:r>
-          </a:p>
-        </p:txBody>
-      </p:sp>
-      <p:sp>
-        <p:nvSpPr>
-          <p:cNvPr id="75" name="TextBox 74"/>
-          <p:cNvSpPr txBox="1"/>
-          <p:nvPr/>
-        </p:nvSpPr>
-        <p:spPr>
-          <a:xfrm>
-            <a:off x="685800" y="2078355"/>
+              <a:t>69</a:t>
+            </a:r>
+          </a:p>
+        </p:txBody>
+      </p:sp>
+      <p:sp>
+        <p:nvSpPr>
+          <p:cNvPr id="78" name="TextBox 77"/>
+          <p:cNvSpPr txBox="1"/>
+          <p:nvPr/>
+        </p:nvSpPr>
+        <p:spPr>
+          <a:xfrm>
+            <a:off x="685800" y="2103475"/>
             <a:ext cx="411480" cy="182880"/>
           </a:xfrm>
           <a:prstGeom prst="rect">
@@ -9244,20 +9349,20 @@
                 </a:solidFill>
                 <a:latin typeface="Calibri"/>
               </a:rPr>
-              <a:t>67</a:t>
-            </a:r>
-          </a:p>
-        </p:txBody>
-      </p:sp>
-      <p:sp>
-        <p:nvSpPr>
-          <p:cNvPr id="76" name="TextBox 75"/>
-          <p:cNvSpPr txBox="1"/>
-          <p:nvPr/>
-        </p:nvSpPr>
-        <p:spPr>
-          <a:xfrm>
-            <a:off x="685800" y="2065020"/>
+              <a:t>70</a:t>
+            </a:r>
+          </a:p>
+        </p:txBody>
+      </p:sp>
+      <p:sp>
+        <p:nvSpPr>
+          <p:cNvPr id="79" name="TextBox 78"/>
+          <p:cNvSpPr txBox="1"/>
+          <p:nvPr/>
+        </p:nvSpPr>
+        <p:spPr>
+          <a:xfrm>
+            <a:off x="685800" y="2091070"/>
             <a:ext cx="411480" cy="182880"/>
           </a:xfrm>
           <a:prstGeom prst="rect">
@@ -9279,20 +9384,20 @@
                 </a:solidFill>
                 <a:latin typeface="Calibri"/>
               </a:rPr>
-              <a:t>68</a:t>
-            </a:r>
-          </a:p>
-        </p:txBody>
-      </p:sp>
-      <p:sp>
-        <p:nvSpPr>
-          <p:cNvPr id="77" name="TextBox 76"/>
-          <p:cNvSpPr txBox="1"/>
-          <p:nvPr/>
-        </p:nvSpPr>
-        <p:spPr>
-          <a:xfrm>
-            <a:off x="685800" y="2051686"/>
+              <a:t>71</a:t>
+            </a:r>
+          </a:p>
+        </p:txBody>
+      </p:sp>
+      <p:sp>
+        <p:nvSpPr>
+          <p:cNvPr id="80" name="TextBox 79"/>
+          <p:cNvSpPr txBox="1"/>
+          <p:nvPr/>
+        </p:nvSpPr>
+        <p:spPr>
+          <a:xfrm>
+            <a:off x="685800" y="2078666"/>
             <a:ext cx="411480" cy="182880"/>
           </a:xfrm>
           <a:prstGeom prst="rect">
@@ -9314,20 +9419,20 @@
                 </a:solidFill>
                 <a:latin typeface="Calibri"/>
               </a:rPr>
-              <a:t>69</a:t>
-            </a:r>
-          </a:p>
-        </p:txBody>
-      </p:sp>
-      <p:sp>
-        <p:nvSpPr>
-          <p:cNvPr id="78" name="TextBox 77"/>
-          <p:cNvSpPr txBox="1"/>
-          <p:nvPr/>
-        </p:nvSpPr>
-        <p:spPr>
-          <a:xfrm>
-            <a:off x="685800" y="2038350"/>
+              <a:t>72</a:t>
+            </a:r>
+          </a:p>
+        </p:txBody>
+      </p:sp>
+      <p:sp>
+        <p:nvSpPr>
+          <p:cNvPr id="81" name="TextBox 80"/>
+          <p:cNvSpPr txBox="1"/>
+          <p:nvPr/>
+        </p:nvSpPr>
+        <p:spPr>
+          <a:xfrm>
+            <a:off x="685800" y="2066261"/>
             <a:ext cx="411480" cy="182880"/>
           </a:xfrm>
           <a:prstGeom prst="rect">
@@ -9349,20 +9454,20 @@
                 </a:solidFill>
                 <a:latin typeface="Calibri"/>
               </a:rPr>
-              <a:t>70</a:t>
-            </a:r>
-          </a:p>
-        </p:txBody>
-      </p:sp>
-      <p:sp>
-        <p:nvSpPr>
-          <p:cNvPr id="79" name="TextBox 78"/>
-          <p:cNvSpPr txBox="1"/>
-          <p:nvPr/>
-        </p:nvSpPr>
-        <p:spPr>
-          <a:xfrm>
-            <a:off x="685800" y="2025015"/>
+              <a:t>73</a:t>
+            </a:r>
+          </a:p>
+        </p:txBody>
+      </p:sp>
+      <p:sp>
+        <p:nvSpPr>
+          <p:cNvPr id="82" name="TextBox 81"/>
+          <p:cNvSpPr txBox="1"/>
+          <p:nvPr/>
+        </p:nvSpPr>
+        <p:spPr>
+          <a:xfrm>
+            <a:off x="685800" y="2053856"/>
             <a:ext cx="411480" cy="182880"/>
           </a:xfrm>
           <a:prstGeom prst="rect">
@@ -9384,20 +9489,20 @@
                 </a:solidFill>
                 <a:latin typeface="Calibri"/>
               </a:rPr>
-              <a:t>71</a:t>
-            </a:r>
-          </a:p>
-        </p:txBody>
-      </p:sp>
-      <p:sp>
-        <p:nvSpPr>
-          <p:cNvPr id="80" name="TextBox 79"/>
-          <p:cNvSpPr txBox="1"/>
-          <p:nvPr/>
-        </p:nvSpPr>
-        <p:spPr>
-          <a:xfrm>
-            <a:off x="685800" y="2011680"/>
+              <a:t>74</a:t>
+            </a:r>
+          </a:p>
+        </p:txBody>
+      </p:sp>
+      <p:sp>
+        <p:nvSpPr>
+          <p:cNvPr id="83" name="TextBox 82"/>
+          <p:cNvSpPr txBox="1"/>
+          <p:nvPr/>
+        </p:nvSpPr>
+        <p:spPr>
+          <a:xfrm>
+            <a:off x="685800" y="2041452"/>
             <a:ext cx="411480" cy="182880"/>
           </a:xfrm>
           <a:prstGeom prst="rect">
@@ -9419,20 +9524,20 @@
                 </a:solidFill>
                 <a:latin typeface="Calibri"/>
               </a:rPr>
-              <a:t>72</a:t>
-            </a:r>
-          </a:p>
-        </p:txBody>
-      </p:sp>
-      <p:sp>
-        <p:nvSpPr>
-          <p:cNvPr id="81" name="TextBox 80"/>
-          <p:cNvSpPr txBox="1"/>
-          <p:nvPr/>
-        </p:nvSpPr>
-        <p:spPr>
-          <a:xfrm>
-            <a:off x="685800" y="1998346"/>
+              <a:t>75</a:t>
+            </a:r>
+          </a:p>
+        </p:txBody>
+      </p:sp>
+      <p:sp>
+        <p:nvSpPr>
+          <p:cNvPr id="84" name="TextBox 83"/>
+          <p:cNvSpPr txBox="1"/>
+          <p:nvPr/>
+        </p:nvSpPr>
+        <p:spPr>
+          <a:xfrm>
+            <a:off x="685800" y="2029047"/>
             <a:ext cx="411480" cy="182880"/>
           </a:xfrm>
           <a:prstGeom prst="rect">
@@ -9454,20 +9559,20 @@
                 </a:solidFill>
                 <a:latin typeface="Calibri"/>
               </a:rPr>
-              <a:t>73</a:t>
-            </a:r>
-          </a:p>
-        </p:txBody>
-      </p:sp>
-      <p:sp>
-        <p:nvSpPr>
-          <p:cNvPr id="82" name="TextBox 81"/>
-          <p:cNvSpPr txBox="1"/>
-          <p:nvPr/>
-        </p:nvSpPr>
-        <p:spPr>
-          <a:xfrm>
-            <a:off x="685800" y="1985010"/>
+              <a:t>76</a:t>
+            </a:r>
+          </a:p>
+        </p:txBody>
+      </p:sp>
+      <p:sp>
+        <p:nvSpPr>
+          <p:cNvPr id="85" name="TextBox 84"/>
+          <p:cNvSpPr txBox="1"/>
+          <p:nvPr/>
+        </p:nvSpPr>
+        <p:spPr>
+          <a:xfrm>
+            <a:off x="685800" y="2016642"/>
             <a:ext cx="411480" cy="182880"/>
           </a:xfrm>
           <a:prstGeom prst="rect">
@@ -9489,20 +9594,20 @@
                 </a:solidFill>
                 <a:latin typeface="Calibri"/>
               </a:rPr>
-              <a:t>74</a:t>
-            </a:r>
-          </a:p>
-        </p:txBody>
-      </p:sp>
-      <p:sp>
-        <p:nvSpPr>
-          <p:cNvPr id="83" name="TextBox 82"/>
-          <p:cNvSpPr txBox="1"/>
-          <p:nvPr/>
-        </p:nvSpPr>
-        <p:spPr>
-          <a:xfrm>
-            <a:off x="685800" y="1971675"/>
+              <a:t>77</a:t>
+            </a:r>
+          </a:p>
+        </p:txBody>
+      </p:sp>
+      <p:sp>
+        <p:nvSpPr>
+          <p:cNvPr id="86" name="TextBox 85"/>
+          <p:cNvSpPr txBox="1"/>
+          <p:nvPr/>
+        </p:nvSpPr>
+        <p:spPr>
+          <a:xfrm>
+            <a:off x="685800" y="2004238"/>
             <a:ext cx="411480" cy="182880"/>
           </a:xfrm>
           <a:prstGeom prst="rect">
@@ -9524,20 +9629,20 @@
                 </a:solidFill>
                 <a:latin typeface="Calibri"/>
               </a:rPr>
-              <a:t>75</a:t>
-            </a:r>
-          </a:p>
-        </p:txBody>
-      </p:sp>
-      <p:sp>
-        <p:nvSpPr>
-          <p:cNvPr id="84" name="TextBox 83"/>
-          <p:cNvSpPr txBox="1"/>
-          <p:nvPr/>
-        </p:nvSpPr>
-        <p:spPr>
-          <a:xfrm>
-            <a:off x="685800" y="1958340"/>
+              <a:t>78</a:t>
+            </a:r>
+          </a:p>
+        </p:txBody>
+      </p:sp>
+      <p:sp>
+        <p:nvSpPr>
+          <p:cNvPr id="87" name="TextBox 86"/>
+          <p:cNvSpPr txBox="1"/>
+          <p:nvPr/>
+        </p:nvSpPr>
+        <p:spPr>
+          <a:xfrm>
+            <a:off x="685800" y="1991833"/>
             <a:ext cx="411480" cy="182880"/>
           </a:xfrm>
           <a:prstGeom prst="rect">
@@ -9559,20 +9664,20 @@
                 </a:solidFill>
                 <a:latin typeface="Calibri"/>
               </a:rPr>
-              <a:t>76</a:t>
-            </a:r>
-          </a:p>
-        </p:txBody>
-      </p:sp>
-      <p:sp>
-        <p:nvSpPr>
-          <p:cNvPr id="85" name="TextBox 84"/>
-          <p:cNvSpPr txBox="1"/>
-          <p:nvPr/>
-        </p:nvSpPr>
-        <p:spPr>
-          <a:xfrm>
-            <a:off x="685800" y="1945005"/>
+              <a:t>79</a:t>
+            </a:r>
+          </a:p>
+        </p:txBody>
+      </p:sp>
+      <p:sp>
+        <p:nvSpPr>
+          <p:cNvPr id="88" name="TextBox 87"/>
+          <p:cNvSpPr txBox="1"/>
+          <p:nvPr/>
+        </p:nvSpPr>
+        <p:spPr>
+          <a:xfrm>
+            <a:off x="685800" y="1979428"/>
             <a:ext cx="411480" cy="182880"/>
           </a:xfrm>
           <a:prstGeom prst="rect">
@@ -9594,20 +9699,20 @@
                 </a:solidFill>
                 <a:latin typeface="Calibri"/>
               </a:rPr>
-              <a:t>77</a:t>
-            </a:r>
-          </a:p>
-        </p:txBody>
-      </p:sp>
-      <p:sp>
-        <p:nvSpPr>
-          <p:cNvPr id="86" name="TextBox 85"/>
-          <p:cNvSpPr txBox="1"/>
-          <p:nvPr/>
-        </p:nvSpPr>
-        <p:spPr>
-          <a:xfrm>
-            <a:off x="685800" y="1931670"/>
+              <a:t>80</a:t>
+            </a:r>
+          </a:p>
+        </p:txBody>
+      </p:sp>
+      <p:sp>
+        <p:nvSpPr>
+          <p:cNvPr id="89" name="TextBox 88"/>
+          <p:cNvSpPr txBox="1"/>
+          <p:nvPr/>
+        </p:nvSpPr>
+        <p:spPr>
+          <a:xfrm>
+            <a:off x="685800" y="1967024"/>
             <a:ext cx="411480" cy="182880"/>
           </a:xfrm>
           <a:prstGeom prst="rect">
@@ -9629,20 +9734,20 @@
                 </a:solidFill>
                 <a:latin typeface="Calibri"/>
               </a:rPr>
-              <a:t>78</a:t>
-            </a:r>
-          </a:p>
-        </p:txBody>
-      </p:sp>
-      <p:sp>
-        <p:nvSpPr>
-          <p:cNvPr id="87" name="TextBox 86"/>
-          <p:cNvSpPr txBox="1"/>
-          <p:nvPr/>
-        </p:nvSpPr>
-        <p:spPr>
-          <a:xfrm>
-            <a:off x="685800" y="1918335"/>
+              <a:t>81</a:t>
+            </a:r>
+          </a:p>
+        </p:txBody>
+      </p:sp>
+      <p:sp>
+        <p:nvSpPr>
+          <p:cNvPr id="90" name="TextBox 89"/>
+          <p:cNvSpPr txBox="1"/>
+          <p:nvPr/>
+        </p:nvSpPr>
+        <p:spPr>
+          <a:xfrm>
+            <a:off x="685800" y="1954619"/>
             <a:ext cx="411480" cy="182880"/>
           </a:xfrm>
           <a:prstGeom prst="rect">
@@ -9664,14 +9769,119 @@
                 </a:solidFill>
                 <a:latin typeface="Calibri"/>
               </a:rPr>
-              <a:t>79</a:t>
-            </a:r>
-          </a:p>
-        </p:txBody>
-      </p:sp>
-      <p:sp>
-        <p:nvSpPr>
-          <p:cNvPr id="88" name="TextBox 87"/>
+              <a:t>82</a:t>
+            </a:r>
+          </a:p>
+        </p:txBody>
+      </p:sp>
+      <p:sp>
+        <p:nvSpPr>
+          <p:cNvPr id="91" name="TextBox 90"/>
+          <p:cNvSpPr txBox="1"/>
+          <p:nvPr/>
+        </p:nvSpPr>
+        <p:spPr>
+          <a:xfrm>
+            <a:off x="685800" y="1942214"/>
+            <a:ext cx="411480" cy="182880"/>
+          </a:xfrm>
+          <a:prstGeom prst="rect">
+            <a:avLst/>
+          </a:prstGeom>
+          <a:noFill/>
+        </p:spPr>
+        <p:txBody>
+          <a:bodyPr wrap="square" lIns="0" rIns="0" tIns="0" bIns="0">
+            <a:spAutoFit/>
+          </a:bodyPr>
+          <a:lstStyle/>
+          <a:p>
+            <a:pPr algn="r"/>
+            <a:r>
+              <a:rPr sz="900" b="0">
+                <a:solidFill>
+                  <a:srgbClr val="718096"/>
+                </a:solidFill>
+                <a:latin typeface="Calibri"/>
+              </a:rPr>
+              <a:t>83</a:t>
+            </a:r>
+          </a:p>
+        </p:txBody>
+      </p:sp>
+      <p:sp>
+        <p:nvSpPr>
+          <p:cNvPr id="92" name="TextBox 91"/>
+          <p:cNvSpPr txBox="1"/>
+          <p:nvPr/>
+        </p:nvSpPr>
+        <p:spPr>
+          <a:xfrm>
+            <a:off x="685800" y="1929810"/>
+            <a:ext cx="411480" cy="182880"/>
+          </a:xfrm>
+          <a:prstGeom prst="rect">
+            <a:avLst/>
+          </a:prstGeom>
+          <a:noFill/>
+        </p:spPr>
+        <p:txBody>
+          <a:bodyPr wrap="square" lIns="0" rIns="0" tIns="0" bIns="0">
+            <a:spAutoFit/>
+          </a:bodyPr>
+          <a:lstStyle/>
+          <a:p>
+            <a:pPr algn="r"/>
+            <a:r>
+              <a:rPr sz="900" b="0">
+                <a:solidFill>
+                  <a:srgbClr val="718096"/>
+                </a:solidFill>
+                <a:latin typeface="Calibri"/>
+              </a:rPr>
+              <a:t>84</a:t>
+            </a:r>
+          </a:p>
+        </p:txBody>
+      </p:sp>
+      <p:sp>
+        <p:nvSpPr>
+          <p:cNvPr id="93" name="TextBox 92"/>
+          <p:cNvSpPr txBox="1"/>
+          <p:nvPr/>
+        </p:nvSpPr>
+        <p:spPr>
+          <a:xfrm>
+            <a:off x="685800" y="1917405"/>
+            <a:ext cx="411480" cy="182880"/>
+          </a:xfrm>
+          <a:prstGeom prst="rect">
+            <a:avLst/>
+          </a:prstGeom>
+          <a:noFill/>
+        </p:spPr>
+        <p:txBody>
+          <a:bodyPr wrap="square" lIns="0" rIns="0" tIns="0" bIns="0">
+            <a:spAutoFit/>
+          </a:bodyPr>
+          <a:lstStyle/>
+          <a:p>
+            <a:pPr algn="r"/>
+            <a:r>
+              <a:rPr sz="900" b="0">
+                <a:solidFill>
+                  <a:srgbClr val="718096"/>
+                </a:solidFill>
+                <a:latin typeface="Calibri"/>
+              </a:rPr>
+              <a:t>85</a:t>
+            </a:r>
+          </a:p>
+        </p:txBody>
+      </p:sp>
+      <p:sp>
+        <p:nvSpPr>
+          <p:cNvPr id="94" name="TextBox 93"/>
           <p:cNvSpPr txBox="1"/>
           <p:nvPr/>
         </p:nvSpPr>
@@ -9699,20 +9909,20 @@
                 </a:solidFill>
                 <a:latin typeface="Calibri"/>
               </a:rPr>
-              <a:t>80</a:t>
-            </a:r>
-          </a:p>
-        </p:txBody>
-      </p:sp>
-      <p:sp>
-        <p:nvSpPr>
-          <p:cNvPr id="89" name="TextBox 88"/>
-          <p:cNvSpPr txBox="1"/>
-          <p:nvPr/>
-        </p:nvSpPr>
-        <p:spPr>
-          <a:xfrm>
-            <a:off x="685800" y="1891665"/>
+              <a:t>86</a:t>
+            </a:r>
+          </a:p>
+        </p:txBody>
+      </p:sp>
+      <p:sp>
+        <p:nvSpPr>
+          <p:cNvPr id="95" name="TextBox 94"/>
+          <p:cNvSpPr txBox="1"/>
+          <p:nvPr/>
+        </p:nvSpPr>
+        <p:spPr>
+          <a:xfrm>
+            <a:off x="685800" y="1892596"/>
             <a:ext cx="411480" cy="182880"/>
           </a:xfrm>
           <a:prstGeom prst="rect">
@@ -9734,20 +9944,20 @@
                 </a:solidFill>
                 <a:latin typeface="Calibri"/>
               </a:rPr>
-              <a:t>81</a:t>
-            </a:r>
-          </a:p>
-        </p:txBody>
-      </p:sp>
-      <p:sp>
-        <p:nvSpPr>
-          <p:cNvPr id="90" name="TextBox 89"/>
-          <p:cNvSpPr txBox="1"/>
-          <p:nvPr/>
-        </p:nvSpPr>
-        <p:spPr>
-          <a:xfrm>
-            <a:off x="685800" y="1878330"/>
+              <a:t>87</a:t>
+            </a:r>
+          </a:p>
+        </p:txBody>
+      </p:sp>
+      <p:sp>
+        <p:nvSpPr>
+          <p:cNvPr id="96" name="TextBox 95"/>
+          <p:cNvSpPr txBox="1"/>
+          <p:nvPr/>
+        </p:nvSpPr>
+        <p:spPr>
+          <a:xfrm>
+            <a:off x="685800" y="1880191"/>
             <a:ext cx="411480" cy="182880"/>
           </a:xfrm>
           <a:prstGeom prst="rect">
@@ -9769,20 +9979,20 @@
                 </a:solidFill>
                 <a:latin typeface="Calibri"/>
               </a:rPr>
-              <a:t>82</a:t>
-            </a:r>
-          </a:p>
-        </p:txBody>
-      </p:sp>
-      <p:sp>
-        <p:nvSpPr>
-          <p:cNvPr id="91" name="TextBox 90"/>
-          <p:cNvSpPr txBox="1"/>
-          <p:nvPr/>
-        </p:nvSpPr>
-        <p:spPr>
-          <a:xfrm>
-            <a:off x="685800" y="1864995"/>
+              <a:t>88</a:t>
+            </a:r>
+          </a:p>
+        </p:txBody>
+      </p:sp>
+      <p:sp>
+        <p:nvSpPr>
+          <p:cNvPr id="97" name="TextBox 96"/>
+          <p:cNvSpPr txBox="1"/>
+          <p:nvPr/>
+        </p:nvSpPr>
+        <p:spPr>
+          <a:xfrm>
+            <a:off x="685800" y="1867787"/>
             <a:ext cx="411480" cy="182880"/>
           </a:xfrm>
           <a:prstGeom prst="rect">
@@ -9804,20 +10014,20 @@
                 </a:solidFill>
                 <a:latin typeface="Calibri"/>
               </a:rPr>
-              <a:t>83</a:t>
-            </a:r>
-          </a:p>
-        </p:txBody>
-      </p:sp>
-      <p:sp>
-        <p:nvSpPr>
-          <p:cNvPr id="92" name="TextBox 91"/>
-          <p:cNvSpPr txBox="1"/>
-          <p:nvPr/>
-        </p:nvSpPr>
-        <p:spPr>
-          <a:xfrm>
-            <a:off x="685800" y="1851660"/>
+              <a:t>89</a:t>
+            </a:r>
+          </a:p>
+        </p:txBody>
+      </p:sp>
+      <p:sp>
+        <p:nvSpPr>
+          <p:cNvPr id="98" name="TextBox 97"/>
+          <p:cNvSpPr txBox="1"/>
+          <p:nvPr/>
+        </p:nvSpPr>
+        <p:spPr>
+          <a:xfrm>
+            <a:off x="685800" y="1855382"/>
             <a:ext cx="411480" cy="182880"/>
           </a:xfrm>
           <a:prstGeom prst="rect">
@@ -9839,20 +10049,20 @@
                 </a:solidFill>
                 <a:latin typeface="Calibri"/>
               </a:rPr>
-              <a:t>84</a:t>
-            </a:r>
-          </a:p>
-        </p:txBody>
-      </p:sp>
-      <p:sp>
-        <p:nvSpPr>
-          <p:cNvPr id="93" name="TextBox 92"/>
-          <p:cNvSpPr txBox="1"/>
-          <p:nvPr/>
-        </p:nvSpPr>
-        <p:spPr>
-          <a:xfrm>
-            <a:off x="685800" y="1838325"/>
+              <a:t>90</a:t>
+            </a:r>
+          </a:p>
+        </p:txBody>
+      </p:sp>
+      <p:sp>
+        <p:nvSpPr>
+          <p:cNvPr id="99" name="TextBox 98"/>
+          <p:cNvSpPr txBox="1"/>
+          <p:nvPr/>
+        </p:nvSpPr>
+        <p:spPr>
+          <a:xfrm>
+            <a:off x="685800" y="1842977"/>
             <a:ext cx="411480" cy="182880"/>
           </a:xfrm>
           <a:prstGeom prst="rect">
@@ -9874,20 +10084,20 @@
                 </a:solidFill>
                 <a:latin typeface="Calibri"/>
               </a:rPr>
-              <a:t>85</a:t>
-            </a:r>
-          </a:p>
-        </p:txBody>
-      </p:sp>
-      <p:sp>
-        <p:nvSpPr>
-          <p:cNvPr id="94" name="TextBox 93"/>
-          <p:cNvSpPr txBox="1"/>
-          <p:nvPr/>
-        </p:nvSpPr>
-        <p:spPr>
-          <a:xfrm>
-            <a:off x="685800" y="1824990"/>
+              <a:t>91</a:t>
+            </a:r>
+          </a:p>
+        </p:txBody>
+      </p:sp>
+      <p:sp>
+        <p:nvSpPr>
+          <p:cNvPr id="100" name="TextBox 99"/>
+          <p:cNvSpPr txBox="1"/>
+          <p:nvPr/>
+        </p:nvSpPr>
+        <p:spPr>
+          <a:xfrm>
+            <a:off x="685800" y="1830573"/>
             <a:ext cx="411480" cy="182880"/>
           </a:xfrm>
           <a:prstGeom prst="rect">
@@ -9909,20 +10119,20 @@
                 </a:solidFill>
                 <a:latin typeface="Calibri"/>
               </a:rPr>
-              <a:t>86</a:t>
-            </a:r>
-          </a:p>
-        </p:txBody>
-      </p:sp>
-      <p:sp>
-        <p:nvSpPr>
-          <p:cNvPr id="95" name="TextBox 94"/>
-          <p:cNvSpPr txBox="1"/>
-          <p:nvPr/>
-        </p:nvSpPr>
-        <p:spPr>
-          <a:xfrm>
-            <a:off x="685800" y="1811655"/>
+              <a:t>92</a:t>
+            </a:r>
+          </a:p>
+        </p:txBody>
+      </p:sp>
+      <p:sp>
+        <p:nvSpPr>
+          <p:cNvPr id="101" name="TextBox 100"/>
+          <p:cNvSpPr txBox="1"/>
+          <p:nvPr/>
+        </p:nvSpPr>
+        <p:spPr>
+          <a:xfrm>
+            <a:off x="685800" y="1818168"/>
             <a:ext cx="411480" cy="182880"/>
           </a:xfrm>
           <a:prstGeom prst="rect">
@@ -9944,20 +10154,20 @@
                 </a:solidFill>
                 <a:latin typeface="Calibri"/>
               </a:rPr>
-              <a:t>87</a:t>
-            </a:r>
-          </a:p>
-        </p:txBody>
-      </p:sp>
-      <p:sp>
-        <p:nvSpPr>
-          <p:cNvPr id="96" name="TextBox 95"/>
-          <p:cNvSpPr txBox="1"/>
-          <p:nvPr/>
-        </p:nvSpPr>
-        <p:spPr>
-          <a:xfrm>
-            <a:off x="685800" y="1798320"/>
+              <a:t>93</a:t>
+            </a:r>
+          </a:p>
+        </p:txBody>
+      </p:sp>
+      <p:sp>
+        <p:nvSpPr>
+          <p:cNvPr id="102" name="TextBox 101"/>
+          <p:cNvSpPr txBox="1"/>
+          <p:nvPr/>
+        </p:nvSpPr>
+        <p:spPr>
+          <a:xfrm>
+            <a:off x="685800" y="1805763"/>
             <a:ext cx="411480" cy="182880"/>
           </a:xfrm>
           <a:prstGeom prst="rect">
@@ -9979,20 +10189,20 @@
                 </a:solidFill>
                 <a:latin typeface="Calibri"/>
               </a:rPr>
-              <a:t>88</a:t>
-            </a:r>
-          </a:p>
-        </p:txBody>
-      </p:sp>
-      <p:sp>
-        <p:nvSpPr>
-          <p:cNvPr id="97" name="TextBox 96"/>
-          <p:cNvSpPr txBox="1"/>
-          <p:nvPr/>
-        </p:nvSpPr>
-        <p:spPr>
-          <a:xfrm>
-            <a:off x="685800" y="1784985"/>
+              <a:t>94</a:t>
+            </a:r>
+          </a:p>
+        </p:txBody>
+      </p:sp>
+      <p:sp>
+        <p:nvSpPr>
+          <p:cNvPr id="103" name="TextBox 102"/>
+          <p:cNvSpPr txBox="1"/>
+          <p:nvPr/>
+        </p:nvSpPr>
+        <p:spPr>
+          <a:xfrm>
+            <a:off x="685800" y="1793359"/>
             <a:ext cx="411480" cy="182880"/>
           </a:xfrm>
           <a:prstGeom prst="rect">
@@ -10014,20 +10224,20 @@
                 </a:solidFill>
                 <a:latin typeface="Calibri"/>
               </a:rPr>
-              <a:t>89</a:t>
-            </a:r>
-          </a:p>
-        </p:txBody>
-      </p:sp>
-      <p:sp>
-        <p:nvSpPr>
-          <p:cNvPr id="98" name="TextBox 97"/>
-          <p:cNvSpPr txBox="1"/>
-          <p:nvPr/>
-        </p:nvSpPr>
-        <p:spPr>
-          <a:xfrm>
-            <a:off x="685800" y="1771650"/>
+              <a:t>95</a:t>
+            </a:r>
+          </a:p>
+        </p:txBody>
+      </p:sp>
+      <p:sp>
+        <p:nvSpPr>
+          <p:cNvPr id="104" name="TextBox 103"/>
+          <p:cNvSpPr txBox="1"/>
+          <p:nvPr/>
+        </p:nvSpPr>
+        <p:spPr>
+          <a:xfrm>
+            <a:off x="685800" y="1780954"/>
             <a:ext cx="411480" cy="182880"/>
           </a:xfrm>
           <a:prstGeom prst="rect">
@@ -10049,20 +10259,20 @@
                 </a:solidFill>
                 <a:latin typeface="Calibri"/>
               </a:rPr>
-              <a:t>90</a:t>
-            </a:r>
-          </a:p>
-        </p:txBody>
-      </p:sp>
-      <p:sp>
-        <p:nvSpPr>
-          <p:cNvPr id="99" name="TextBox 98"/>
-          <p:cNvSpPr txBox="1"/>
-          <p:nvPr/>
-        </p:nvSpPr>
-        <p:spPr>
-          <a:xfrm>
-            <a:off x="685800" y="1758315"/>
+              <a:t>96</a:t>
+            </a:r>
+          </a:p>
+        </p:txBody>
+      </p:sp>
+      <p:sp>
+        <p:nvSpPr>
+          <p:cNvPr id="105" name="TextBox 104"/>
+          <p:cNvSpPr txBox="1"/>
+          <p:nvPr/>
+        </p:nvSpPr>
+        <p:spPr>
+          <a:xfrm>
+            <a:off x="685800" y="1768549"/>
             <a:ext cx="411480" cy="182880"/>
           </a:xfrm>
           <a:prstGeom prst="rect">
@@ -10084,20 +10294,20 @@
                 </a:solidFill>
                 <a:latin typeface="Calibri"/>
               </a:rPr>
-              <a:t>91</a:t>
-            </a:r>
-          </a:p>
-        </p:txBody>
-      </p:sp>
-      <p:sp>
-        <p:nvSpPr>
-          <p:cNvPr id="100" name="TextBox 99"/>
-          <p:cNvSpPr txBox="1"/>
-          <p:nvPr/>
-        </p:nvSpPr>
-        <p:spPr>
-          <a:xfrm>
-            <a:off x="685800" y="1744980"/>
+              <a:t>97</a:t>
+            </a:r>
+          </a:p>
+        </p:txBody>
+      </p:sp>
+      <p:sp>
+        <p:nvSpPr>
+          <p:cNvPr id="106" name="TextBox 105"/>
+          <p:cNvSpPr txBox="1"/>
+          <p:nvPr/>
+        </p:nvSpPr>
+        <p:spPr>
+          <a:xfrm>
+            <a:off x="685800" y="1756145"/>
             <a:ext cx="411480" cy="182880"/>
           </a:xfrm>
           <a:prstGeom prst="rect">
@@ -10119,20 +10329,20 @@
                 </a:solidFill>
                 <a:latin typeface="Calibri"/>
               </a:rPr>
-              <a:t>92</a:t>
-            </a:r>
-          </a:p>
-        </p:txBody>
-      </p:sp>
-      <p:sp>
-        <p:nvSpPr>
-          <p:cNvPr id="101" name="TextBox 100"/>
-          <p:cNvSpPr txBox="1"/>
-          <p:nvPr/>
-        </p:nvSpPr>
-        <p:spPr>
-          <a:xfrm>
-            <a:off x="685800" y="1731645"/>
+              <a:t>98</a:t>
+            </a:r>
+          </a:p>
+        </p:txBody>
+      </p:sp>
+      <p:sp>
+        <p:nvSpPr>
+          <p:cNvPr id="107" name="TextBox 106"/>
+          <p:cNvSpPr txBox="1"/>
+          <p:nvPr/>
+        </p:nvSpPr>
+        <p:spPr>
+          <a:xfrm>
+            <a:off x="685800" y="1743740"/>
             <a:ext cx="411480" cy="182880"/>
           </a:xfrm>
           <a:prstGeom prst="rect">
@@ -10154,20 +10364,20 @@
                 </a:solidFill>
                 <a:latin typeface="Calibri"/>
               </a:rPr>
-              <a:t>93</a:t>
-            </a:r>
-          </a:p>
-        </p:txBody>
-      </p:sp>
-      <p:sp>
-        <p:nvSpPr>
-          <p:cNvPr id="102" name="TextBox 101"/>
-          <p:cNvSpPr txBox="1"/>
-          <p:nvPr/>
-        </p:nvSpPr>
-        <p:spPr>
-          <a:xfrm>
-            <a:off x="685800" y="1718310"/>
+              <a:t>99</a:t>
+            </a:r>
+          </a:p>
+        </p:txBody>
+      </p:sp>
+      <p:sp>
+        <p:nvSpPr>
+          <p:cNvPr id="108" name="TextBox 107"/>
+          <p:cNvSpPr txBox="1"/>
+          <p:nvPr/>
+        </p:nvSpPr>
+        <p:spPr>
+          <a:xfrm>
+            <a:off x="685800" y="1731335"/>
             <a:ext cx="411480" cy="182880"/>
           </a:xfrm>
           <a:prstGeom prst="rect">
@@ -10189,20 +10399,20 @@
                 </a:solidFill>
                 <a:latin typeface="Calibri"/>
               </a:rPr>
-              <a:t>94</a:t>
-            </a:r>
-          </a:p>
-        </p:txBody>
-      </p:sp>
-      <p:sp>
-        <p:nvSpPr>
-          <p:cNvPr id="103" name="TextBox 102"/>
-          <p:cNvSpPr txBox="1"/>
-          <p:nvPr/>
-        </p:nvSpPr>
-        <p:spPr>
-          <a:xfrm>
-            <a:off x="685800" y="1704975"/>
+              <a:t>100</a:t>
+            </a:r>
+          </a:p>
+        </p:txBody>
+      </p:sp>
+      <p:sp>
+        <p:nvSpPr>
+          <p:cNvPr id="109" name="TextBox 108"/>
+          <p:cNvSpPr txBox="1"/>
+          <p:nvPr/>
+        </p:nvSpPr>
+        <p:spPr>
+          <a:xfrm>
+            <a:off x="685800" y="1718931"/>
             <a:ext cx="411480" cy="182880"/>
           </a:xfrm>
           <a:prstGeom prst="rect">
@@ -10224,20 +10434,20 @@
                 </a:solidFill>
                 <a:latin typeface="Calibri"/>
               </a:rPr>
-              <a:t>95</a:t>
-            </a:r>
-          </a:p>
-        </p:txBody>
-      </p:sp>
-      <p:sp>
-        <p:nvSpPr>
-          <p:cNvPr id="104" name="TextBox 103"/>
-          <p:cNvSpPr txBox="1"/>
-          <p:nvPr/>
-        </p:nvSpPr>
-        <p:spPr>
-          <a:xfrm>
-            <a:off x="685800" y="1691640"/>
+              <a:t>101</a:t>
+            </a:r>
+          </a:p>
+        </p:txBody>
+      </p:sp>
+      <p:sp>
+        <p:nvSpPr>
+          <p:cNvPr id="110" name="TextBox 109"/>
+          <p:cNvSpPr txBox="1"/>
+          <p:nvPr/>
+        </p:nvSpPr>
+        <p:spPr>
+          <a:xfrm>
+            <a:off x="685800" y="1706526"/>
             <a:ext cx="411480" cy="182880"/>
           </a:xfrm>
           <a:prstGeom prst="rect">
@@ -10259,20 +10469,20 @@
                 </a:solidFill>
                 <a:latin typeface="Calibri"/>
               </a:rPr>
-              <a:t>96</a:t>
-            </a:r>
-          </a:p>
-        </p:txBody>
-      </p:sp>
-      <p:sp>
-        <p:nvSpPr>
-          <p:cNvPr id="105" name="TextBox 104"/>
-          <p:cNvSpPr txBox="1"/>
-          <p:nvPr/>
-        </p:nvSpPr>
-        <p:spPr>
-          <a:xfrm>
-            <a:off x="685800" y="1678305"/>
+              <a:t>102</a:t>
+            </a:r>
+          </a:p>
+        </p:txBody>
+      </p:sp>
+      <p:sp>
+        <p:nvSpPr>
+          <p:cNvPr id="111" name="TextBox 110"/>
+          <p:cNvSpPr txBox="1"/>
+          <p:nvPr/>
+        </p:nvSpPr>
+        <p:spPr>
+          <a:xfrm>
+            <a:off x="685800" y="1694121"/>
             <a:ext cx="411480" cy="182880"/>
           </a:xfrm>
           <a:prstGeom prst="rect">
@@ -10294,20 +10504,20 @@
                 </a:solidFill>
                 <a:latin typeface="Calibri"/>
               </a:rPr>
-              <a:t>97</a:t>
-            </a:r>
-          </a:p>
-        </p:txBody>
-      </p:sp>
-      <p:sp>
-        <p:nvSpPr>
-          <p:cNvPr id="106" name="TextBox 105"/>
-          <p:cNvSpPr txBox="1"/>
-          <p:nvPr/>
-        </p:nvSpPr>
-        <p:spPr>
-          <a:xfrm>
-            <a:off x="685800" y="1664970"/>
+              <a:t>103</a:t>
+            </a:r>
+          </a:p>
+        </p:txBody>
+      </p:sp>
+      <p:sp>
+        <p:nvSpPr>
+          <p:cNvPr id="112" name="TextBox 111"/>
+          <p:cNvSpPr txBox="1"/>
+          <p:nvPr/>
+        </p:nvSpPr>
+        <p:spPr>
+          <a:xfrm>
+            <a:off x="685800" y="1681717"/>
             <a:ext cx="411480" cy="182880"/>
           </a:xfrm>
           <a:prstGeom prst="rect">
@@ -10329,20 +10539,20 @@
                 </a:solidFill>
                 <a:latin typeface="Calibri"/>
               </a:rPr>
-              <a:t>98</a:t>
-            </a:r>
-          </a:p>
-        </p:txBody>
-      </p:sp>
-      <p:sp>
-        <p:nvSpPr>
-          <p:cNvPr id="107" name="TextBox 106"/>
-          <p:cNvSpPr txBox="1"/>
-          <p:nvPr/>
-        </p:nvSpPr>
-        <p:spPr>
-          <a:xfrm>
-            <a:off x="685800" y="1651635"/>
+              <a:t>104</a:t>
+            </a:r>
+          </a:p>
+        </p:txBody>
+      </p:sp>
+      <p:sp>
+        <p:nvSpPr>
+          <p:cNvPr id="113" name="TextBox 112"/>
+          <p:cNvSpPr txBox="1"/>
+          <p:nvPr/>
+        </p:nvSpPr>
+        <p:spPr>
+          <a:xfrm>
+            <a:off x="685800" y="1669312"/>
             <a:ext cx="411480" cy="182880"/>
           </a:xfrm>
           <a:prstGeom prst="rect">
@@ -10364,20 +10574,20 @@
                 </a:solidFill>
                 <a:latin typeface="Calibri"/>
               </a:rPr>
-              <a:t>99</a:t>
-            </a:r>
-          </a:p>
-        </p:txBody>
-      </p:sp>
-      <p:sp>
-        <p:nvSpPr>
-          <p:cNvPr id="108" name="TextBox 107"/>
-          <p:cNvSpPr txBox="1"/>
-          <p:nvPr/>
-        </p:nvSpPr>
-        <p:spPr>
-          <a:xfrm>
-            <a:off x="685800" y="1638300"/>
+              <a:t>105</a:t>
+            </a:r>
+          </a:p>
+        </p:txBody>
+      </p:sp>
+      <p:sp>
+        <p:nvSpPr>
+          <p:cNvPr id="114" name="TextBox 113"/>
+          <p:cNvSpPr txBox="1"/>
+          <p:nvPr/>
+        </p:nvSpPr>
+        <p:spPr>
+          <a:xfrm>
+            <a:off x="685800" y="1656907"/>
             <a:ext cx="411480" cy="182880"/>
           </a:xfrm>
           <a:prstGeom prst="rect">
@@ -10399,20 +10609,20 @@
                 </a:solidFill>
                 <a:latin typeface="Calibri"/>
               </a:rPr>
-              <a:t>100</a:t>
-            </a:r>
-          </a:p>
-        </p:txBody>
-      </p:sp>
-      <p:sp>
-        <p:nvSpPr>
-          <p:cNvPr id="109" name="TextBox 108"/>
-          <p:cNvSpPr txBox="1"/>
-          <p:nvPr/>
-        </p:nvSpPr>
-        <p:spPr>
-          <a:xfrm>
-            <a:off x="685800" y="1624965"/>
+              <a:t>106</a:t>
+            </a:r>
+          </a:p>
+        </p:txBody>
+      </p:sp>
+      <p:sp>
+        <p:nvSpPr>
+          <p:cNvPr id="115" name="TextBox 114"/>
+          <p:cNvSpPr txBox="1"/>
+          <p:nvPr/>
+        </p:nvSpPr>
+        <p:spPr>
+          <a:xfrm>
+            <a:off x="685800" y="1644503"/>
             <a:ext cx="411480" cy="182880"/>
           </a:xfrm>
           <a:prstGeom prst="rect">
@@ -10434,20 +10644,20 @@
                 </a:solidFill>
                 <a:latin typeface="Calibri"/>
               </a:rPr>
-              <a:t>101</a:t>
-            </a:r>
-          </a:p>
-        </p:txBody>
-      </p:sp>
-      <p:sp>
-        <p:nvSpPr>
-          <p:cNvPr id="110" name="TextBox 109"/>
-          <p:cNvSpPr txBox="1"/>
-          <p:nvPr/>
-        </p:nvSpPr>
-        <p:spPr>
-          <a:xfrm>
-            <a:off x="685800" y="1611630"/>
+              <a:t>107</a:t>
+            </a:r>
+          </a:p>
+        </p:txBody>
+      </p:sp>
+      <p:sp>
+        <p:nvSpPr>
+          <p:cNvPr id="116" name="TextBox 115"/>
+          <p:cNvSpPr txBox="1"/>
+          <p:nvPr/>
+        </p:nvSpPr>
+        <p:spPr>
+          <a:xfrm>
+            <a:off x="685800" y="1632098"/>
             <a:ext cx="411480" cy="182880"/>
           </a:xfrm>
           <a:prstGeom prst="rect">
@@ -10469,20 +10679,20 @@
                 </a:solidFill>
                 <a:latin typeface="Calibri"/>
               </a:rPr>
-              <a:t>102</a:t>
-            </a:r>
-          </a:p>
-        </p:txBody>
-      </p:sp>
-      <p:sp>
-        <p:nvSpPr>
-          <p:cNvPr id="111" name="TextBox 110"/>
-          <p:cNvSpPr txBox="1"/>
-          <p:nvPr/>
-        </p:nvSpPr>
-        <p:spPr>
-          <a:xfrm>
-            <a:off x="685800" y="1598295"/>
+              <a:t>108</a:t>
+            </a:r>
+          </a:p>
+        </p:txBody>
+      </p:sp>
+      <p:sp>
+        <p:nvSpPr>
+          <p:cNvPr id="117" name="TextBox 116"/>
+          <p:cNvSpPr txBox="1"/>
+          <p:nvPr/>
+        </p:nvSpPr>
+        <p:spPr>
+          <a:xfrm>
+            <a:off x="685800" y="1619694"/>
             <a:ext cx="411480" cy="182880"/>
           </a:xfrm>
           <a:prstGeom prst="rect">
@@ -10504,20 +10714,20 @@
                 </a:solidFill>
                 <a:latin typeface="Calibri"/>
               </a:rPr>
-              <a:t>103</a:t>
-            </a:r>
-          </a:p>
-        </p:txBody>
-      </p:sp>
-      <p:sp>
-        <p:nvSpPr>
-          <p:cNvPr id="112" name="TextBox 111"/>
-          <p:cNvSpPr txBox="1"/>
-          <p:nvPr/>
-        </p:nvSpPr>
-        <p:spPr>
-          <a:xfrm>
-            <a:off x="685800" y="1584960"/>
+              <a:t>109</a:t>
+            </a:r>
+          </a:p>
+        </p:txBody>
+      </p:sp>
+      <p:sp>
+        <p:nvSpPr>
+          <p:cNvPr id="118" name="TextBox 117"/>
+          <p:cNvSpPr txBox="1"/>
+          <p:nvPr/>
+        </p:nvSpPr>
+        <p:spPr>
+          <a:xfrm>
+            <a:off x="685800" y="1607289"/>
             <a:ext cx="411480" cy="182880"/>
           </a:xfrm>
           <a:prstGeom prst="rect">
@@ -10539,20 +10749,20 @@
                 </a:solidFill>
                 <a:latin typeface="Calibri"/>
               </a:rPr>
-              <a:t>104</a:t>
-            </a:r>
-          </a:p>
-        </p:txBody>
-      </p:sp>
-      <p:sp>
-        <p:nvSpPr>
-          <p:cNvPr id="113" name="TextBox 112"/>
-          <p:cNvSpPr txBox="1"/>
-          <p:nvPr/>
-        </p:nvSpPr>
-        <p:spPr>
-          <a:xfrm>
-            <a:off x="685800" y="1571625"/>
+              <a:t>110</a:t>
+            </a:r>
+          </a:p>
+        </p:txBody>
+      </p:sp>
+      <p:sp>
+        <p:nvSpPr>
+          <p:cNvPr id="119" name="TextBox 118"/>
+          <p:cNvSpPr txBox="1"/>
+          <p:nvPr/>
+        </p:nvSpPr>
+        <p:spPr>
+          <a:xfrm>
+            <a:off x="685800" y="1594884"/>
             <a:ext cx="411480" cy="182880"/>
           </a:xfrm>
           <a:prstGeom prst="rect">
@@ -10574,20 +10784,20 @@
                 </a:solidFill>
                 <a:latin typeface="Calibri"/>
               </a:rPr>
-              <a:t>105</a:t>
-            </a:r>
-          </a:p>
-        </p:txBody>
-      </p:sp>
-      <p:sp>
-        <p:nvSpPr>
-          <p:cNvPr id="114" name="TextBox 113"/>
-          <p:cNvSpPr txBox="1"/>
-          <p:nvPr/>
-        </p:nvSpPr>
-        <p:spPr>
-          <a:xfrm>
-            <a:off x="685800" y="1558290"/>
+              <a:t>111</a:t>
+            </a:r>
+          </a:p>
+        </p:txBody>
+      </p:sp>
+      <p:sp>
+        <p:nvSpPr>
+          <p:cNvPr id="120" name="TextBox 119"/>
+          <p:cNvSpPr txBox="1"/>
+          <p:nvPr/>
+        </p:nvSpPr>
+        <p:spPr>
+          <a:xfrm>
+            <a:off x="685800" y="1582480"/>
             <a:ext cx="411480" cy="182880"/>
           </a:xfrm>
           <a:prstGeom prst="rect">
@@ -10609,20 +10819,20 @@
                 </a:solidFill>
                 <a:latin typeface="Calibri"/>
               </a:rPr>
-              <a:t>106</a:t>
-            </a:r>
-          </a:p>
-        </p:txBody>
-      </p:sp>
-      <p:sp>
-        <p:nvSpPr>
-          <p:cNvPr id="115" name="TextBox 114"/>
-          <p:cNvSpPr txBox="1"/>
-          <p:nvPr/>
-        </p:nvSpPr>
-        <p:spPr>
-          <a:xfrm>
-            <a:off x="685800" y="1544955"/>
+              <a:t>112</a:t>
+            </a:r>
+          </a:p>
+        </p:txBody>
+      </p:sp>
+      <p:sp>
+        <p:nvSpPr>
+          <p:cNvPr id="121" name="TextBox 120"/>
+          <p:cNvSpPr txBox="1"/>
+          <p:nvPr/>
+        </p:nvSpPr>
+        <p:spPr>
+          <a:xfrm>
+            <a:off x="685800" y="1570075"/>
             <a:ext cx="411480" cy="182880"/>
           </a:xfrm>
           <a:prstGeom prst="rect">
@@ -10644,20 +10854,20 @@
                 </a:solidFill>
                 <a:latin typeface="Calibri"/>
               </a:rPr>
-              <a:t>107</a:t>
-            </a:r>
-          </a:p>
-        </p:txBody>
-      </p:sp>
-      <p:sp>
-        <p:nvSpPr>
-          <p:cNvPr id="116" name="TextBox 115"/>
-          <p:cNvSpPr txBox="1"/>
-          <p:nvPr/>
-        </p:nvSpPr>
-        <p:spPr>
-          <a:xfrm>
-            <a:off x="685800" y="1531620"/>
+              <a:t>113</a:t>
+            </a:r>
+          </a:p>
+        </p:txBody>
+      </p:sp>
+      <p:sp>
+        <p:nvSpPr>
+          <p:cNvPr id="122" name="TextBox 121"/>
+          <p:cNvSpPr txBox="1"/>
+          <p:nvPr/>
+        </p:nvSpPr>
+        <p:spPr>
+          <a:xfrm>
+            <a:off x="685800" y="1557670"/>
             <a:ext cx="411480" cy="182880"/>
           </a:xfrm>
           <a:prstGeom prst="rect">
@@ -10679,20 +10889,20 @@
                 </a:solidFill>
                 <a:latin typeface="Calibri"/>
               </a:rPr>
-              <a:t>108</a:t>
-            </a:r>
-          </a:p>
-        </p:txBody>
-      </p:sp>
-      <p:sp>
-        <p:nvSpPr>
-          <p:cNvPr id="117" name="TextBox 116"/>
-          <p:cNvSpPr txBox="1"/>
-          <p:nvPr/>
-        </p:nvSpPr>
-        <p:spPr>
-          <a:xfrm>
-            <a:off x="685800" y="1518285"/>
+              <a:t>114</a:t>
+            </a:r>
+          </a:p>
+        </p:txBody>
+      </p:sp>
+      <p:sp>
+        <p:nvSpPr>
+          <p:cNvPr id="123" name="TextBox 122"/>
+          <p:cNvSpPr txBox="1"/>
+          <p:nvPr/>
+        </p:nvSpPr>
+        <p:spPr>
+          <a:xfrm>
+            <a:off x="685800" y="1545266"/>
             <a:ext cx="411480" cy="182880"/>
           </a:xfrm>
           <a:prstGeom prst="rect">
@@ -10714,20 +10924,20 @@
                 </a:solidFill>
                 <a:latin typeface="Calibri"/>
               </a:rPr>
-              <a:t>109</a:t>
-            </a:r>
-          </a:p>
-        </p:txBody>
-      </p:sp>
-      <p:sp>
-        <p:nvSpPr>
-          <p:cNvPr id="118" name="TextBox 117"/>
-          <p:cNvSpPr txBox="1"/>
-          <p:nvPr/>
-        </p:nvSpPr>
-        <p:spPr>
-          <a:xfrm>
-            <a:off x="685800" y="1504950"/>
+              <a:t>115</a:t>
+            </a:r>
+          </a:p>
+        </p:txBody>
+      </p:sp>
+      <p:sp>
+        <p:nvSpPr>
+          <p:cNvPr id="124" name="TextBox 123"/>
+          <p:cNvSpPr txBox="1"/>
+          <p:nvPr/>
+        </p:nvSpPr>
+        <p:spPr>
+          <a:xfrm>
+            <a:off x="685800" y="1532861"/>
             <a:ext cx="411480" cy="182880"/>
           </a:xfrm>
           <a:prstGeom prst="rect">
@@ -10749,20 +10959,20 @@
                 </a:solidFill>
                 <a:latin typeface="Calibri"/>
               </a:rPr>
-              <a:t>110</a:t>
-            </a:r>
-          </a:p>
-        </p:txBody>
-      </p:sp>
-      <p:sp>
-        <p:nvSpPr>
-          <p:cNvPr id="119" name="TextBox 118"/>
-          <p:cNvSpPr txBox="1"/>
-          <p:nvPr/>
-        </p:nvSpPr>
-        <p:spPr>
-          <a:xfrm>
-            <a:off x="685800" y="1491615"/>
+              <a:t>116</a:t>
+            </a:r>
+          </a:p>
+        </p:txBody>
+      </p:sp>
+      <p:sp>
+        <p:nvSpPr>
+          <p:cNvPr id="125" name="TextBox 124"/>
+          <p:cNvSpPr txBox="1"/>
+          <p:nvPr/>
+        </p:nvSpPr>
+        <p:spPr>
+          <a:xfrm>
+            <a:off x="685800" y="1520456"/>
             <a:ext cx="411480" cy="182880"/>
           </a:xfrm>
           <a:prstGeom prst="rect">
@@ -10784,20 +10994,20 @@
                 </a:solidFill>
                 <a:latin typeface="Calibri"/>
               </a:rPr>
-              <a:t>111</a:t>
-            </a:r>
-          </a:p>
-        </p:txBody>
-      </p:sp>
-      <p:sp>
-        <p:nvSpPr>
-          <p:cNvPr id="120" name="TextBox 119"/>
-          <p:cNvSpPr txBox="1"/>
-          <p:nvPr/>
-        </p:nvSpPr>
-        <p:spPr>
-          <a:xfrm>
-            <a:off x="685800" y="1478280"/>
+              <a:t>117</a:t>
+            </a:r>
+          </a:p>
+        </p:txBody>
+      </p:sp>
+      <p:sp>
+        <p:nvSpPr>
+          <p:cNvPr id="126" name="TextBox 125"/>
+          <p:cNvSpPr txBox="1"/>
+          <p:nvPr/>
+        </p:nvSpPr>
+        <p:spPr>
+          <a:xfrm>
+            <a:off x="685800" y="1508052"/>
             <a:ext cx="411480" cy="182880"/>
           </a:xfrm>
           <a:prstGeom prst="rect">
@@ -10819,20 +11029,20 @@
                 </a:solidFill>
                 <a:latin typeface="Calibri"/>
               </a:rPr>
-              <a:t>112</a:t>
-            </a:r>
-          </a:p>
-        </p:txBody>
-      </p:sp>
-      <p:sp>
-        <p:nvSpPr>
-          <p:cNvPr id="121" name="TextBox 120"/>
-          <p:cNvSpPr txBox="1"/>
-          <p:nvPr/>
-        </p:nvSpPr>
-        <p:spPr>
-          <a:xfrm>
-            <a:off x="685800" y="1464945"/>
+              <a:t>118</a:t>
+            </a:r>
+          </a:p>
+        </p:txBody>
+      </p:sp>
+      <p:sp>
+        <p:nvSpPr>
+          <p:cNvPr id="127" name="TextBox 126"/>
+          <p:cNvSpPr txBox="1"/>
+          <p:nvPr/>
+        </p:nvSpPr>
+        <p:spPr>
+          <a:xfrm>
+            <a:off x="685800" y="1495647"/>
             <a:ext cx="411480" cy="182880"/>
           </a:xfrm>
           <a:prstGeom prst="rect">
@@ -10854,20 +11064,20 @@
                 </a:solidFill>
                 <a:latin typeface="Calibri"/>
               </a:rPr>
-              <a:t>113</a:t>
-            </a:r>
-          </a:p>
-        </p:txBody>
-      </p:sp>
-      <p:sp>
-        <p:nvSpPr>
-          <p:cNvPr id="122" name="TextBox 121"/>
-          <p:cNvSpPr txBox="1"/>
-          <p:nvPr/>
-        </p:nvSpPr>
-        <p:spPr>
-          <a:xfrm>
-            <a:off x="685800" y="1451610"/>
+              <a:t>119</a:t>
+            </a:r>
+          </a:p>
+        </p:txBody>
+      </p:sp>
+      <p:sp>
+        <p:nvSpPr>
+          <p:cNvPr id="128" name="TextBox 127"/>
+          <p:cNvSpPr txBox="1"/>
+          <p:nvPr/>
+        </p:nvSpPr>
+        <p:spPr>
+          <a:xfrm>
+            <a:off x="685800" y="1483242"/>
             <a:ext cx="411480" cy="182880"/>
           </a:xfrm>
           <a:prstGeom prst="rect">
@@ -10889,20 +11099,20 @@
                 </a:solidFill>
                 <a:latin typeface="Calibri"/>
               </a:rPr>
-              <a:t>114</a:t>
-            </a:r>
-          </a:p>
-        </p:txBody>
-      </p:sp>
-      <p:sp>
-        <p:nvSpPr>
-          <p:cNvPr id="123" name="TextBox 122"/>
-          <p:cNvSpPr txBox="1"/>
-          <p:nvPr/>
-        </p:nvSpPr>
-        <p:spPr>
-          <a:xfrm>
-            <a:off x="685800" y="1438275"/>
+              <a:t>120</a:t>
+            </a:r>
+          </a:p>
+        </p:txBody>
+      </p:sp>
+      <p:sp>
+        <p:nvSpPr>
+          <p:cNvPr id="129" name="TextBox 128"/>
+          <p:cNvSpPr txBox="1"/>
+          <p:nvPr/>
+        </p:nvSpPr>
+        <p:spPr>
+          <a:xfrm>
+            <a:off x="685800" y="1470838"/>
             <a:ext cx="411480" cy="182880"/>
           </a:xfrm>
           <a:prstGeom prst="rect">
@@ -10924,20 +11134,20 @@
                 </a:solidFill>
                 <a:latin typeface="Calibri"/>
               </a:rPr>
-              <a:t>115</a:t>
-            </a:r>
-          </a:p>
-        </p:txBody>
-      </p:sp>
-      <p:sp>
-        <p:nvSpPr>
-          <p:cNvPr id="124" name="TextBox 123"/>
-          <p:cNvSpPr txBox="1"/>
-          <p:nvPr/>
-        </p:nvSpPr>
-        <p:spPr>
-          <a:xfrm>
-            <a:off x="685800" y="1424940"/>
+              <a:t>121</a:t>
+            </a:r>
+          </a:p>
+        </p:txBody>
+      </p:sp>
+      <p:sp>
+        <p:nvSpPr>
+          <p:cNvPr id="130" name="TextBox 129"/>
+          <p:cNvSpPr txBox="1"/>
+          <p:nvPr/>
+        </p:nvSpPr>
+        <p:spPr>
+          <a:xfrm>
+            <a:off x="685800" y="1458433"/>
             <a:ext cx="411480" cy="182880"/>
           </a:xfrm>
           <a:prstGeom prst="rect">
@@ -10959,20 +11169,20 @@
                 </a:solidFill>
                 <a:latin typeface="Calibri"/>
               </a:rPr>
-              <a:t>116</a:t>
-            </a:r>
-          </a:p>
-        </p:txBody>
-      </p:sp>
-      <p:sp>
-        <p:nvSpPr>
-          <p:cNvPr id="125" name="TextBox 124"/>
-          <p:cNvSpPr txBox="1"/>
-          <p:nvPr/>
-        </p:nvSpPr>
-        <p:spPr>
-          <a:xfrm>
-            <a:off x="685800" y="1411605"/>
+              <a:t>122</a:t>
+            </a:r>
+          </a:p>
+        </p:txBody>
+      </p:sp>
+      <p:sp>
+        <p:nvSpPr>
+          <p:cNvPr id="131" name="TextBox 130"/>
+          <p:cNvSpPr txBox="1"/>
+          <p:nvPr/>
+        </p:nvSpPr>
+        <p:spPr>
+          <a:xfrm>
+            <a:off x="685800" y="1446028"/>
             <a:ext cx="411480" cy="182880"/>
           </a:xfrm>
           <a:prstGeom prst="rect">
@@ -10994,20 +11204,20 @@
                 </a:solidFill>
                 <a:latin typeface="Calibri"/>
               </a:rPr>
-              <a:t>117</a:t>
-            </a:r>
-          </a:p>
-        </p:txBody>
-      </p:sp>
-      <p:sp>
-        <p:nvSpPr>
-          <p:cNvPr id="126" name="TextBox 125"/>
-          <p:cNvSpPr txBox="1"/>
-          <p:nvPr/>
-        </p:nvSpPr>
-        <p:spPr>
-          <a:xfrm>
-            <a:off x="685800" y="1398270"/>
+              <a:t>123</a:t>
+            </a:r>
+          </a:p>
+        </p:txBody>
+      </p:sp>
+      <p:sp>
+        <p:nvSpPr>
+          <p:cNvPr id="132" name="TextBox 131"/>
+          <p:cNvSpPr txBox="1"/>
+          <p:nvPr/>
+        </p:nvSpPr>
+        <p:spPr>
+          <a:xfrm>
+            <a:off x="685800" y="1433624"/>
             <a:ext cx="411480" cy="182880"/>
           </a:xfrm>
           <a:prstGeom prst="rect">
@@ -11029,20 +11239,20 @@
                 </a:solidFill>
                 <a:latin typeface="Calibri"/>
               </a:rPr>
-              <a:t>118</a:t>
-            </a:r>
-          </a:p>
-        </p:txBody>
-      </p:sp>
-      <p:sp>
-        <p:nvSpPr>
-          <p:cNvPr id="127" name="TextBox 126"/>
-          <p:cNvSpPr txBox="1"/>
-          <p:nvPr/>
-        </p:nvSpPr>
-        <p:spPr>
-          <a:xfrm>
-            <a:off x="685800" y="1384935"/>
+              <a:t>124</a:t>
+            </a:r>
+          </a:p>
+        </p:txBody>
+      </p:sp>
+      <p:sp>
+        <p:nvSpPr>
+          <p:cNvPr id="133" name="TextBox 132"/>
+          <p:cNvSpPr txBox="1"/>
+          <p:nvPr/>
+        </p:nvSpPr>
+        <p:spPr>
+          <a:xfrm>
+            <a:off x="685800" y="1421219"/>
             <a:ext cx="411480" cy="182880"/>
           </a:xfrm>
           <a:prstGeom prst="rect">
@@ -11064,14 +11274,119 @@
                 </a:solidFill>
                 <a:latin typeface="Calibri"/>
               </a:rPr>
-              <a:t>119</a:t>
-            </a:r>
-          </a:p>
-        </p:txBody>
-      </p:sp>
-      <p:sp>
-        <p:nvSpPr>
-          <p:cNvPr id="128" name="TextBox 127"/>
+              <a:t>125</a:t>
+            </a:r>
+          </a:p>
+        </p:txBody>
+      </p:sp>
+      <p:sp>
+        <p:nvSpPr>
+          <p:cNvPr id="134" name="TextBox 133"/>
+          <p:cNvSpPr txBox="1"/>
+          <p:nvPr/>
+        </p:nvSpPr>
+        <p:spPr>
+          <a:xfrm>
+            <a:off x="685800" y="1408814"/>
+            <a:ext cx="411480" cy="182880"/>
+          </a:xfrm>
+          <a:prstGeom prst="rect">
+            <a:avLst/>
+          </a:prstGeom>
+          <a:noFill/>
+        </p:spPr>
+        <p:txBody>
+          <a:bodyPr wrap="square" lIns="0" rIns="0" tIns="0" bIns="0">
+            <a:spAutoFit/>
+          </a:bodyPr>
+          <a:lstStyle/>
+          <a:p>
+            <a:pPr algn="r"/>
+            <a:r>
+              <a:rPr sz="900" b="0">
+                <a:solidFill>
+                  <a:srgbClr val="718096"/>
+                </a:solidFill>
+                <a:latin typeface="Calibri"/>
+              </a:rPr>
+              <a:t>126</a:t>
+            </a:r>
+          </a:p>
+        </p:txBody>
+      </p:sp>
+      <p:sp>
+        <p:nvSpPr>
+          <p:cNvPr id="135" name="TextBox 134"/>
+          <p:cNvSpPr txBox="1"/>
+          <p:nvPr/>
+        </p:nvSpPr>
+        <p:spPr>
+          <a:xfrm>
+            <a:off x="685800" y="1396410"/>
+            <a:ext cx="411480" cy="182880"/>
+          </a:xfrm>
+          <a:prstGeom prst="rect">
+            <a:avLst/>
+          </a:prstGeom>
+          <a:noFill/>
+        </p:spPr>
+        <p:txBody>
+          <a:bodyPr wrap="square" lIns="0" rIns="0" tIns="0" bIns="0">
+            <a:spAutoFit/>
+          </a:bodyPr>
+          <a:lstStyle/>
+          <a:p>
+            <a:pPr algn="r"/>
+            <a:r>
+              <a:rPr sz="900" b="0">
+                <a:solidFill>
+                  <a:srgbClr val="718096"/>
+                </a:solidFill>
+                <a:latin typeface="Calibri"/>
+              </a:rPr>
+              <a:t>127</a:t>
+            </a:r>
+          </a:p>
+        </p:txBody>
+      </p:sp>
+      <p:sp>
+        <p:nvSpPr>
+          <p:cNvPr id="136" name="TextBox 135"/>
+          <p:cNvSpPr txBox="1"/>
+          <p:nvPr/>
+        </p:nvSpPr>
+        <p:spPr>
+          <a:xfrm>
+            <a:off x="685800" y="1384005"/>
+            <a:ext cx="411480" cy="182880"/>
+          </a:xfrm>
+          <a:prstGeom prst="rect">
+            <a:avLst/>
+          </a:prstGeom>
+          <a:noFill/>
+        </p:spPr>
+        <p:txBody>
+          <a:bodyPr wrap="square" lIns="0" rIns="0" tIns="0" bIns="0">
+            <a:spAutoFit/>
+          </a:bodyPr>
+          <a:lstStyle/>
+          <a:p>
+            <a:pPr algn="r"/>
+            <a:r>
+              <a:rPr sz="900" b="0">
+                <a:solidFill>
+                  <a:srgbClr val="718096"/>
+                </a:solidFill>
+                <a:latin typeface="Calibri"/>
+              </a:rPr>
+              <a:t>128</a:t>
+            </a:r>
+          </a:p>
+        </p:txBody>
+      </p:sp>
+      <p:sp>
+        <p:nvSpPr>
+          <p:cNvPr id="137" name="TextBox 136"/>
           <p:cNvSpPr txBox="1"/>
           <p:nvPr/>
         </p:nvSpPr>
@@ -11099,21 +11414,21 @@
                 </a:solidFill>
                 <a:latin typeface="Calibri"/>
               </a:rPr>
-              <a:t>120</a:t>
-            </a:r>
-          </a:p>
-        </p:txBody>
-      </p:sp>
-      <p:sp>
-        <p:nvSpPr>
-          <p:cNvPr id="129" name="Rectangle 128"/>
+              <a:t>129</a:t>
+            </a:r>
+          </a:p>
+        </p:txBody>
+      </p:sp>
+      <p:sp>
+        <p:nvSpPr>
+          <p:cNvPr id="138" name="Rectangle 137"/>
           <p:cNvSpPr/>
           <p:nvPr/>
         </p:nvSpPr>
         <p:spPr>
           <a:xfrm>
-            <a:off x="1505560" y="3023235"/>
-            <a:ext cx="774496" cy="40005"/>
+            <a:off x="1505560" y="3026027"/>
+            <a:ext cx="774496" cy="37213"/>
           </a:xfrm>
           <a:prstGeom prst="rect">
             <a:avLst/>
@@ -11149,7 +11464,7 @@
       </p:sp>
       <p:sp>
         <p:nvSpPr>
-          <p:cNvPr id="130" name="TextBox 129"/>
+          <p:cNvPr id="139" name="TextBox 138"/>
           <p:cNvSpPr txBox="1"/>
           <p:nvPr/>
         </p:nvSpPr>
@@ -11184,7 +11499,7 @@
       </p:sp>
       <p:sp>
         <p:nvSpPr>
-          <p:cNvPr id="131" name="TextBox 130"/>
+          <p:cNvPr id="140" name="TextBox 139"/>
           <p:cNvSpPr txBox="1"/>
           <p:nvPr/>
         </p:nvSpPr>
@@ -11219,14 +11534,14 @@
       </p:sp>
       <p:sp>
         <p:nvSpPr>
-          <p:cNvPr id="132" name="Rectangle 131"/>
+          <p:cNvPr id="141" name="Rectangle 140"/>
           <p:cNvSpPr/>
           <p:nvPr/>
         </p:nvSpPr>
         <p:spPr>
           <a:xfrm>
-            <a:off x="2913736" y="2903220"/>
-            <a:ext cx="774496" cy="160020"/>
+            <a:off x="2913736" y="2852361"/>
+            <a:ext cx="774496" cy="210879"/>
           </a:xfrm>
           <a:prstGeom prst="rect">
             <a:avLst/>
@@ -11262,14 +11577,14 @@
       </p:sp>
       <p:sp>
         <p:nvSpPr>
-          <p:cNvPr id="133" name="Rectangle 132"/>
+          <p:cNvPr id="142" name="Rectangle 141"/>
           <p:cNvSpPr/>
           <p:nvPr/>
         </p:nvSpPr>
         <p:spPr>
           <a:xfrm>
-            <a:off x="2913736" y="2849880"/>
-            <a:ext cx="774496" cy="53340"/>
+            <a:off x="2913736" y="2790338"/>
+            <a:ext cx="774496" cy="62023"/>
           </a:xfrm>
           <a:prstGeom prst="rect">
             <a:avLst/>
@@ -11305,7 +11620,7 @@
       </p:sp>
       <p:sp>
         <p:nvSpPr>
-          <p:cNvPr id="134" name="TextBox 133"/>
+          <p:cNvPr id="143" name="TextBox 142"/>
           <p:cNvSpPr txBox="1"/>
           <p:nvPr/>
         </p:nvSpPr>
@@ -11340,7 +11655,7 @@
       </p:sp>
       <p:sp>
         <p:nvSpPr>
-          <p:cNvPr id="135" name="TextBox 134"/>
+          <p:cNvPr id="144" name="TextBox 143"/>
           <p:cNvSpPr txBox="1"/>
           <p:nvPr/>
         </p:nvSpPr>
@@ -11368,21 +11683,21 @@
                 </a:solidFill>
                 <a:latin typeface="Calibri"/>
               </a:rPr>
-              <a:t>4 / 16</a:t>
-            </a:r>
-          </a:p>
-        </p:txBody>
-      </p:sp>
-      <p:sp>
-        <p:nvSpPr>
-          <p:cNvPr id="136" name="Rectangle 135"/>
+              <a:t>5 / 22</a:t>
+            </a:r>
+          </a:p>
+        </p:txBody>
+      </p:sp>
+      <p:sp>
+        <p:nvSpPr>
+          <p:cNvPr id="145" name="Rectangle 144"/>
           <p:cNvSpPr/>
           <p:nvPr/>
         </p:nvSpPr>
         <p:spPr>
           <a:xfrm>
-            <a:off x="4321912" y="2649855"/>
-            <a:ext cx="774496" cy="413385"/>
+            <a:off x="4321912" y="2579459"/>
+            <a:ext cx="774496" cy="483781"/>
           </a:xfrm>
           <a:prstGeom prst="rect">
             <a:avLst/>
@@ -11418,14 +11733,14 @@
       </p:sp>
       <p:sp>
         <p:nvSpPr>
-          <p:cNvPr id="137" name="Rectangle 136"/>
+          <p:cNvPr id="146" name="Rectangle 145"/>
           <p:cNvSpPr/>
           <p:nvPr/>
         </p:nvSpPr>
         <p:spPr>
           <a:xfrm>
-            <a:off x="4321912" y="1463040"/>
-            <a:ext cx="774496" cy="1186815"/>
+            <a:off x="4321912" y="1463041"/>
+            <a:ext cx="774496" cy="1116418"/>
           </a:xfrm>
           <a:prstGeom prst="rect">
             <a:avLst/>
@@ -11461,7 +11776,7 @@
       </p:sp>
       <p:sp>
         <p:nvSpPr>
-          <p:cNvPr id="138" name="TextBox 137"/>
+          <p:cNvPr id="147" name="TextBox 146"/>
           <p:cNvSpPr txBox="1"/>
           <p:nvPr/>
         </p:nvSpPr>
@@ -11496,7 +11811,7 @@
       </p:sp>
       <p:sp>
         <p:nvSpPr>
-          <p:cNvPr id="139" name="TextBox 138"/>
+          <p:cNvPr id="148" name="TextBox 147"/>
           <p:cNvSpPr txBox="1"/>
           <p:nvPr/>
         </p:nvSpPr>
@@ -11524,21 +11839,21 @@
                 </a:solidFill>
                 <a:latin typeface="Calibri"/>
               </a:rPr>
-              <a:t>89 / 120</a:t>
-            </a:r>
-          </a:p>
-        </p:txBody>
-      </p:sp>
-      <p:sp>
-        <p:nvSpPr>
-          <p:cNvPr id="140" name="Rectangle 139"/>
+              <a:t>90 / 129</a:t>
+            </a:r>
+          </a:p>
+        </p:txBody>
+      </p:sp>
+      <p:sp>
+        <p:nvSpPr>
+          <p:cNvPr id="149" name="Rectangle 148"/>
           <p:cNvSpPr/>
           <p:nvPr/>
         </p:nvSpPr>
         <p:spPr>
           <a:xfrm>
-            <a:off x="5730088" y="3023235"/>
-            <a:ext cx="774496" cy="40005"/>
+            <a:off x="5730088" y="3026027"/>
+            <a:ext cx="774496" cy="37213"/>
           </a:xfrm>
           <a:prstGeom prst="rect">
             <a:avLst/>
@@ -11574,7 +11889,7 @@
       </p:sp>
       <p:sp>
         <p:nvSpPr>
-          <p:cNvPr id="141" name="TextBox 140"/>
+          <p:cNvPr id="150" name="TextBox 149"/>
           <p:cNvSpPr txBox="1"/>
           <p:nvPr/>
         </p:nvSpPr>
@@ -11609,7 +11924,7 @@
       </p:sp>
       <p:sp>
         <p:nvSpPr>
-          <p:cNvPr id="142" name="TextBox 141"/>
+          <p:cNvPr id="151" name="TextBox 150"/>
           <p:cNvSpPr txBox="1"/>
           <p:nvPr/>
         </p:nvSpPr>
@@ -11644,14 +11959,14 @@
       </p:sp>
       <p:sp>
         <p:nvSpPr>
-          <p:cNvPr id="143" name="Rectangle 142"/>
+          <p:cNvPr id="152" name="Rectangle 151"/>
           <p:cNvSpPr/>
           <p:nvPr/>
         </p:nvSpPr>
         <p:spPr>
           <a:xfrm>
-            <a:off x="7138264" y="3036570"/>
-            <a:ext cx="774496" cy="26670"/>
+            <a:off x="7138264" y="3038431"/>
+            <a:ext cx="774496" cy="24809"/>
           </a:xfrm>
           <a:prstGeom prst="rect">
             <a:avLst/>
@@ -11687,7 +12002,7 @@
       </p:sp>
       <p:sp>
         <p:nvSpPr>
-          <p:cNvPr id="144" name="TextBox 143"/>
+          <p:cNvPr id="153" name="TextBox 152"/>
           <p:cNvSpPr txBox="1"/>
           <p:nvPr/>
         </p:nvSpPr>
@@ -11722,7 +12037,7 @@
       </p:sp>
       <p:sp>
         <p:nvSpPr>
-          <p:cNvPr id="145" name="TextBox 144"/>
+          <p:cNvPr id="154" name="TextBox 153"/>
           <p:cNvSpPr txBox="1"/>
           <p:nvPr/>
         </p:nvSpPr>
@@ -11757,7 +12072,7 @@
       </p:sp>
       <p:sp>
         <p:nvSpPr>
-          <p:cNvPr id="146" name="Rectangle 145"/>
+          <p:cNvPr id="155" name="Rectangle 154"/>
           <p:cNvSpPr/>
           <p:nvPr/>
         </p:nvSpPr>
@@ -11800,7 +12115,7 @@
       </p:sp>
       <p:sp>
         <p:nvSpPr>
-          <p:cNvPr id="147" name="TextBox 146"/>
+          <p:cNvPr id="156" name="TextBox 155"/>
           <p:cNvSpPr txBox="1"/>
           <p:nvPr/>
         </p:nvSpPr>
@@ -11835,7 +12150,7 @@
       </p:sp>
       <p:sp>
         <p:nvSpPr>
-          <p:cNvPr id="148" name="Rectangle 147"/>
+          <p:cNvPr id="157" name="Rectangle 156"/>
           <p:cNvSpPr/>
           <p:nvPr/>
         </p:nvSpPr>
@@ -11878,7 +12193,7 @@
       </p:sp>
       <p:sp>
         <p:nvSpPr>
-          <p:cNvPr id="149" name="TextBox 148"/>
+          <p:cNvPr id="158" name="TextBox 157"/>
           <p:cNvSpPr txBox="1"/>
           <p:nvPr/>
         </p:nvSpPr>
@@ -11913,7 +12228,7 @@
       </p:sp>
       <p:sp>
         <p:nvSpPr>
-          <p:cNvPr id="150" name="Rectangle 149"/>
+          <p:cNvPr id="159" name="Rectangle 158"/>
           <p:cNvSpPr/>
           <p:nvPr/>
         </p:nvSpPr>
@@ -11956,7 +12271,7 @@
       </p:sp>
       <p:sp>
         <p:nvSpPr>
-          <p:cNvPr id="151" name="TextBox 150"/>
+          <p:cNvPr id="160" name="TextBox 159"/>
           <p:cNvSpPr txBox="1"/>
           <p:nvPr/>
         </p:nvSpPr>
@@ -11991,7 +12306,7 @@
       </p:sp>
       <p:sp>
         <p:nvSpPr>
-          <p:cNvPr id="152" name="TextBox 151"/>
+          <p:cNvPr id="161" name="TextBox 160"/>
           <p:cNvSpPr txBox="1"/>
           <p:nvPr/>
         </p:nvSpPr>
